--- a/examples/preview/subjects/生物.pptx
+++ b/examples/preview/subjects/生物.pptx
@@ -3112,7 +3112,7 @@
             <a:avLst/>
           </a:prstGeom>
           <a:solidFill>
-            <a:srgbClr val="E9F6F2"/>
+            <a:srgbClr val="FFFFFF"/>
           </a:solidFill>
           <a:ln>
             <a:noFill/>
@@ -3158,7 +3158,7 @@
           <a:noFill/>
           <a:ln w="15875">
             <a:solidFill>
-              <a:srgbClr val="D5EDE6"/>
+              <a:srgbClr val="DCEBE0"/>
             </a:solidFill>
           </a:ln>
           <a:effectLst/>
@@ -3202,7 +3202,7 @@
           <a:noFill/>
           <a:ln w="15875">
             <a:solidFill>
-              <a:srgbClr val="D5EDE6"/>
+              <a:srgbClr val="DCEBE0"/>
             </a:solidFill>
           </a:ln>
           <a:effectLst/>
@@ -3246,7 +3246,7 @@
           <a:noFill/>
           <a:ln w="15875">
             <a:solidFill>
-              <a:srgbClr val="D5EDE6"/>
+              <a:srgbClr val="DCEBE0"/>
             </a:solidFill>
           </a:ln>
           <a:effectLst/>
@@ -3288,7 +3288,7 @@
             <a:avLst/>
           </a:prstGeom>
           <a:solidFill>
-            <a:srgbClr val="0B6B5F"/>
+            <a:srgbClr val="3F7A52"/>
           </a:solidFill>
           <a:ln>
             <a:noFill/>
@@ -3332,7 +3332,7 @@
             <a:avLst/>
           </a:prstGeom>
           <a:solidFill>
-            <a:srgbClr val="12A48C"/>
+            <a:srgbClr val="70AD47"/>
           </a:solidFill>
           <a:ln>
             <a:noFill/>
@@ -3363,14 +3363,589 @@
       </p:sp>
       <p:sp>
         <p:nvSpPr>
-          <p:cNvPr id="8" name="TextBox 7"/>
+          <p:cNvPr id="8" name="Rounded Rectangle 7"/>
+          <p:cNvSpPr/>
+          <p:nvPr/>
+        </p:nvSpPr>
+        <p:spPr>
+          <a:xfrm>
+            <a:off x="8000780" y="2724912"/>
+            <a:ext cx="1554480" cy="585216"/>
+          </a:xfrm>
+          <a:prstGeom prst="roundRect">
+            <a:avLst>
+              <a:gd name="adj" fmla="val 18000"/>
+            </a:avLst>
+          </a:prstGeom>
+          <a:solidFill>
+            <a:srgbClr val="3F7A52"/>
+          </a:solidFill>
+          <a:ln>
+            <a:noFill/>
+          </a:ln>
+          <a:effectLst/>
+        </p:spPr>
+        <p:style>
+          <a:lnRef idx="1">
+            <a:schemeClr val="accent1"/>
+          </a:lnRef>
+          <a:fillRef idx="3">
+            <a:schemeClr val="accent1"/>
+          </a:fillRef>
+          <a:effectRef idx="2">
+            <a:schemeClr val="accent1"/>
+          </a:effectRef>
+          <a:fontRef idx="minor">
+            <a:schemeClr val="lt1"/>
+          </a:fontRef>
+        </p:style>
+        <p:txBody>
+          <a:bodyPr rtlCol="0" anchor="ctr"/>
+          <a:lstStyle/>
+          <a:p>
+            <a:pPr algn="ctr"/>
+          </a:p>
+        </p:txBody>
+      </p:sp>
+      <p:sp>
+        <p:nvSpPr>
+          <p:cNvPr id="9" name="TextBox 8"/>
           <p:cNvSpPr txBox="1"/>
           <p:nvPr/>
         </p:nvSpPr>
         <p:spPr>
           <a:xfrm>
+            <a:off x="8000780" y="2743200"/>
+            <a:ext cx="1554480" cy="548640"/>
+          </a:xfrm>
+          <a:prstGeom prst="rect">
+            <a:avLst/>
+          </a:prstGeom>
+          <a:noFill/>
+        </p:spPr>
+        <p:txBody>
+          <a:bodyPr wrap="square" anchor="ctr" lIns="54864" rIns="54864" tIns="0" bIns="0">
+            <a:spAutoFit/>
+          </a:bodyPr>
+          <a:lstStyle/>
+          <a:p>
+            <a:pPr algn="ctr">
+              <a:lnSpc>
+                <a:spcPct val="130000"/>
+              </a:lnSpc>
+              <a:defRPr sz="1500"/>
+            </a:pPr>
+            <a:r>
+              <a:rPr sz="1500" b="1" u="none">
+                <a:solidFill>
+                  <a:srgbClr val="FFFFFF"/>
+                </a:solidFill>
+                <a:latin typeface="Times New Roman"/>
+                <a:ea typeface="Noto Sans CJK SC"/>
+              </a:rPr>
+              <a:t>生物</a:t>
+            </a:r>
+          </a:p>
+        </p:txBody>
+      </p:sp>
+      <p:sp>
+        <p:nvSpPr>
+          <p:cNvPr id="10" name="Rounded Rectangle 9"/>
+          <p:cNvSpPr/>
+          <p:nvPr/>
+        </p:nvSpPr>
+        <p:spPr>
+          <a:xfrm>
+            <a:off x="6414150" y="1888236"/>
+            <a:ext cx="1005840" cy="475488"/>
+          </a:xfrm>
+          <a:prstGeom prst="roundRect">
+            <a:avLst>
+              <a:gd name="adj" fmla="val 30000"/>
+            </a:avLst>
+          </a:prstGeom>
+          <a:solidFill>
+            <a:srgbClr val="70AD47"/>
+          </a:solidFill>
+          <a:ln>
+            <a:noFill/>
+          </a:ln>
+          <a:effectLst/>
+        </p:spPr>
+        <p:style>
+          <a:lnRef idx="1">
+            <a:schemeClr val="accent1"/>
+          </a:lnRef>
+          <a:fillRef idx="3">
+            <a:schemeClr val="accent1"/>
+          </a:fillRef>
+          <a:effectRef idx="2">
+            <a:schemeClr val="accent1"/>
+          </a:effectRef>
+          <a:fontRef idx="minor">
+            <a:schemeClr val="lt1"/>
+          </a:fontRef>
+        </p:style>
+        <p:txBody>
+          <a:bodyPr rtlCol="0" anchor="ctr"/>
+          <a:lstStyle/>
+          <a:p>
+            <a:pPr algn="ctr"/>
+          </a:p>
+        </p:txBody>
+      </p:sp>
+      <p:sp>
+        <p:nvSpPr>
+          <p:cNvPr id="11" name="TextBox 10"/>
+          <p:cNvSpPr txBox="1"/>
+          <p:nvPr/>
+        </p:nvSpPr>
+        <p:spPr>
+          <a:xfrm>
+            <a:off x="6414150" y="1906524"/>
+            <a:ext cx="1005840" cy="438912"/>
+          </a:xfrm>
+          <a:prstGeom prst="rect">
+            <a:avLst/>
+          </a:prstGeom>
+          <a:noFill/>
+        </p:spPr>
+        <p:txBody>
+          <a:bodyPr wrap="square" anchor="ctr" lIns="54864" rIns="54864" tIns="0" bIns="0">
+            <a:spAutoFit/>
+          </a:bodyPr>
+          <a:lstStyle/>
+          <a:p>
+            <a:pPr algn="ctr">
+              <a:lnSpc>
+                <a:spcPct val="130000"/>
+              </a:lnSpc>
+              <a:defRPr sz="1200"/>
+            </a:pPr>
+            <a:r>
+              <a:rPr sz="1200" b="1" u="none">
+                <a:solidFill>
+                  <a:srgbClr val="FFFFFF"/>
+                </a:solidFill>
+                <a:latin typeface="Times New Roman"/>
+                <a:ea typeface="Noto Sans CJK SC"/>
+              </a:rPr>
+              <a:t>结构</a:t>
+            </a:r>
+          </a:p>
+        </p:txBody>
+      </p:sp>
+      <p:cxnSp>
+        <p:nvCxnSpPr>
+          <p:cNvPr id="12" name="Connector 11"/>
+          <p:cNvCxnSpPr/>
+          <p:nvPr/>
+        </p:nvCxnSpPr>
+        <p:spPr>
+          <a:xfrm flipH="1" flipV="1">
+            <a:off x="6917070" y="2125980"/>
+            <a:ext cx="1860950" cy="891540"/>
+          </a:xfrm>
+          <a:prstGeom prst="line">
+            <a:avLst/>
+          </a:prstGeom>
+          <a:ln w="12700">
+            <a:solidFill>
+              <a:srgbClr val="C9D6CC"/>
+            </a:solidFill>
+          </a:ln>
+        </p:spPr>
+        <p:style>
+          <a:lnRef idx="2">
+            <a:schemeClr val="accent1"/>
+          </a:lnRef>
+          <a:fillRef idx="0">
+            <a:schemeClr val="accent1"/>
+          </a:fillRef>
+          <a:effectRef idx="1">
+            <a:schemeClr val="accent1"/>
+          </a:effectRef>
+          <a:fontRef idx="minor">
+            <a:schemeClr val="tx1"/>
+          </a:fontRef>
+        </p:style>
+      </p:cxnSp>
+      <p:sp>
+        <p:nvSpPr>
+          <p:cNvPr id="13" name="Rounded Rectangle 12"/>
+          <p:cNvSpPr/>
+          <p:nvPr/>
+        </p:nvSpPr>
+        <p:spPr>
+          <a:xfrm>
+            <a:off x="6414150" y="3671316"/>
+            <a:ext cx="1005840" cy="475488"/>
+          </a:xfrm>
+          <a:prstGeom prst="roundRect">
+            <a:avLst>
+              <a:gd name="adj" fmla="val 30000"/>
+            </a:avLst>
+          </a:prstGeom>
+          <a:solidFill>
+            <a:srgbClr val="5B9BD5"/>
+          </a:solidFill>
+          <a:ln>
+            <a:noFill/>
+          </a:ln>
+          <a:effectLst/>
+        </p:spPr>
+        <p:style>
+          <a:lnRef idx="1">
+            <a:schemeClr val="accent1"/>
+          </a:lnRef>
+          <a:fillRef idx="3">
+            <a:schemeClr val="accent1"/>
+          </a:fillRef>
+          <a:effectRef idx="2">
+            <a:schemeClr val="accent1"/>
+          </a:effectRef>
+          <a:fontRef idx="minor">
+            <a:schemeClr val="lt1"/>
+          </a:fontRef>
+        </p:style>
+        <p:txBody>
+          <a:bodyPr rtlCol="0" anchor="ctr"/>
+          <a:lstStyle/>
+          <a:p>
+            <a:pPr algn="ctr"/>
+          </a:p>
+        </p:txBody>
+      </p:sp>
+      <p:sp>
+        <p:nvSpPr>
+          <p:cNvPr id="14" name="TextBox 13"/>
+          <p:cNvSpPr txBox="1"/>
+          <p:nvPr/>
+        </p:nvSpPr>
+        <p:spPr>
+          <a:xfrm>
+            <a:off x="6414150" y="3689604"/>
+            <a:ext cx="1005840" cy="438912"/>
+          </a:xfrm>
+          <a:prstGeom prst="rect">
+            <a:avLst/>
+          </a:prstGeom>
+          <a:noFill/>
+        </p:spPr>
+        <p:txBody>
+          <a:bodyPr wrap="square" anchor="ctr" lIns="54864" rIns="54864" tIns="0" bIns="0">
+            <a:spAutoFit/>
+          </a:bodyPr>
+          <a:lstStyle/>
+          <a:p>
+            <a:pPr algn="ctr">
+              <a:lnSpc>
+                <a:spcPct val="130000"/>
+              </a:lnSpc>
+              <a:defRPr sz="1200"/>
+            </a:pPr>
+            <a:r>
+              <a:rPr sz="1200" b="1" u="none">
+                <a:solidFill>
+                  <a:srgbClr val="FFFFFF"/>
+                </a:solidFill>
+                <a:latin typeface="Times New Roman"/>
+                <a:ea typeface="Noto Sans CJK SC"/>
+              </a:rPr>
+              <a:t>功能</a:t>
+            </a:r>
+          </a:p>
+        </p:txBody>
+      </p:sp>
+      <p:cxnSp>
+        <p:nvCxnSpPr>
+          <p:cNvPr id="15" name="Connector 14"/>
+          <p:cNvCxnSpPr/>
+          <p:nvPr/>
+        </p:nvCxnSpPr>
+        <p:spPr>
+          <a:xfrm flipH="1">
+            <a:off x="6917070" y="3017520"/>
+            <a:ext cx="1860950" cy="891540"/>
+          </a:xfrm>
+          <a:prstGeom prst="line">
+            <a:avLst/>
+          </a:prstGeom>
+          <a:ln w="12700">
+            <a:solidFill>
+              <a:srgbClr val="C9D6CC"/>
+            </a:solidFill>
+          </a:ln>
+        </p:spPr>
+        <p:style>
+          <a:lnRef idx="2">
+            <a:schemeClr val="accent1"/>
+          </a:lnRef>
+          <a:fillRef idx="0">
+            <a:schemeClr val="accent1"/>
+          </a:fillRef>
+          <a:effectRef idx="1">
+            <a:schemeClr val="accent1"/>
+          </a:effectRef>
+          <a:fontRef idx="minor">
+            <a:schemeClr val="tx1"/>
+          </a:fontRef>
+        </p:style>
+      </p:cxnSp>
+      <p:sp>
+        <p:nvSpPr>
+          <p:cNvPr id="16" name="Rounded Rectangle 15"/>
+          <p:cNvSpPr/>
+          <p:nvPr/>
+        </p:nvSpPr>
+        <p:spPr>
+          <a:xfrm>
+            <a:off x="8275100" y="996696"/>
+            <a:ext cx="1005840" cy="475488"/>
+          </a:xfrm>
+          <a:prstGeom prst="roundRect">
+            <a:avLst>
+              <a:gd name="adj" fmla="val 30000"/>
+            </a:avLst>
+          </a:prstGeom>
+          <a:solidFill>
+            <a:srgbClr val="E8A87C"/>
+          </a:solidFill>
+          <a:ln>
+            <a:noFill/>
+          </a:ln>
+          <a:effectLst/>
+        </p:spPr>
+        <p:style>
+          <a:lnRef idx="1">
+            <a:schemeClr val="accent1"/>
+          </a:lnRef>
+          <a:fillRef idx="3">
+            <a:schemeClr val="accent1"/>
+          </a:fillRef>
+          <a:effectRef idx="2">
+            <a:schemeClr val="accent1"/>
+          </a:effectRef>
+          <a:fontRef idx="minor">
+            <a:schemeClr val="lt1"/>
+          </a:fontRef>
+        </p:style>
+        <p:txBody>
+          <a:bodyPr rtlCol="0" anchor="ctr"/>
+          <a:lstStyle/>
+          <a:p>
+            <a:pPr algn="ctr"/>
+          </a:p>
+        </p:txBody>
+      </p:sp>
+      <p:sp>
+        <p:nvSpPr>
+          <p:cNvPr id="17" name="TextBox 16"/>
+          <p:cNvSpPr txBox="1"/>
+          <p:nvPr/>
+        </p:nvSpPr>
+        <p:spPr>
+          <a:xfrm>
+            <a:off x="8275100" y="1014984"/>
+            <a:ext cx="1005840" cy="438912"/>
+          </a:xfrm>
+          <a:prstGeom prst="rect">
+            <a:avLst/>
+          </a:prstGeom>
+          <a:noFill/>
+        </p:spPr>
+        <p:txBody>
+          <a:bodyPr wrap="square" anchor="ctr" lIns="54864" rIns="54864" tIns="0" bIns="0">
+            <a:spAutoFit/>
+          </a:bodyPr>
+          <a:lstStyle/>
+          <a:p>
+            <a:pPr algn="ctr">
+              <a:lnSpc>
+                <a:spcPct val="130000"/>
+              </a:lnSpc>
+              <a:defRPr sz="1200"/>
+            </a:pPr>
+            <a:r>
+              <a:rPr sz="1200" b="1" u="none">
+                <a:solidFill>
+                  <a:srgbClr val="FFFFFF"/>
+                </a:solidFill>
+                <a:latin typeface="Times New Roman"/>
+                <a:ea typeface="Noto Sans CJK SC"/>
+              </a:rPr>
+              <a:t>特点</a:t>
+            </a:r>
+          </a:p>
+        </p:txBody>
+      </p:sp>
+      <p:cxnSp>
+        <p:nvCxnSpPr>
+          <p:cNvPr id="18" name="Connector 17"/>
+          <p:cNvCxnSpPr/>
+          <p:nvPr/>
+        </p:nvCxnSpPr>
+        <p:spPr>
+          <a:xfrm flipV="1">
+            <a:off x="8778020" y="1234440"/>
+            <a:ext cx="0" cy="1783080"/>
+          </a:xfrm>
+          <a:prstGeom prst="line">
+            <a:avLst/>
+          </a:prstGeom>
+          <a:ln w="12700">
+            <a:solidFill>
+              <a:srgbClr val="C9D6CC"/>
+            </a:solidFill>
+          </a:ln>
+        </p:spPr>
+        <p:style>
+          <a:lnRef idx="2">
+            <a:schemeClr val="accent1"/>
+          </a:lnRef>
+          <a:fillRef idx="0">
+            <a:schemeClr val="accent1"/>
+          </a:fillRef>
+          <a:effectRef idx="1">
+            <a:schemeClr val="accent1"/>
+          </a:effectRef>
+          <a:fontRef idx="minor">
+            <a:schemeClr val="tx1"/>
+          </a:fontRef>
+        </p:style>
+      </p:cxnSp>
+      <p:sp>
+        <p:nvSpPr>
+          <p:cNvPr id="19" name="Rounded Rectangle 18"/>
+          <p:cNvSpPr/>
+          <p:nvPr/>
+        </p:nvSpPr>
+        <p:spPr>
+          <a:xfrm>
+            <a:off x="10136050" y="1888235"/>
+            <a:ext cx="1005840" cy="475488"/>
+          </a:xfrm>
+          <a:prstGeom prst="roundRect">
+            <a:avLst>
+              <a:gd name="adj" fmla="val 30000"/>
+            </a:avLst>
+          </a:prstGeom>
+          <a:solidFill>
+            <a:srgbClr val="B57EDC"/>
+          </a:solidFill>
+          <a:ln>
+            <a:noFill/>
+          </a:ln>
+          <a:effectLst/>
+        </p:spPr>
+        <p:style>
+          <a:lnRef idx="1">
+            <a:schemeClr val="accent1"/>
+          </a:lnRef>
+          <a:fillRef idx="3">
+            <a:schemeClr val="accent1"/>
+          </a:fillRef>
+          <a:effectRef idx="2">
+            <a:schemeClr val="accent1"/>
+          </a:effectRef>
+          <a:fontRef idx="minor">
+            <a:schemeClr val="lt1"/>
+          </a:fontRef>
+        </p:style>
+        <p:txBody>
+          <a:bodyPr rtlCol="0" anchor="ctr"/>
+          <a:lstStyle/>
+          <a:p>
+            <a:pPr algn="ctr"/>
+          </a:p>
+        </p:txBody>
+      </p:sp>
+      <p:sp>
+        <p:nvSpPr>
+          <p:cNvPr id="20" name="TextBox 19"/>
+          <p:cNvSpPr txBox="1"/>
+          <p:nvPr/>
+        </p:nvSpPr>
+        <p:spPr>
+          <a:xfrm>
+            <a:off x="10136050" y="1906523"/>
+            <a:ext cx="1005840" cy="438912"/>
+          </a:xfrm>
+          <a:prstGeom prst="rect">
+            <a:avLst/>
+          </a:prstGeom>
+          <a:noFill/>
+        </p:spPr>
+        <p:txBody>
+          <a:bodyPr wrap="square" anchor="ctr" lIns="54864" rIns="54864" tIns="0" bIns="0">
+            <a:spAutoFit/>
+          </a:bodyPr>
+          <a:lstStyle/>
+          <a:p>
+            <a:pPr algn="ctr">
+              <a:lnSpc>
+                <a:spcPct val="130000"/>
+              </a:lnSpc>
+              <a:defRPr sz="1200"/>
+            </a:pPr>
+            <a:r>
+              <a:rPr sz="1200" b="1" u="none">
+                <a:solidFill>
+                  <a:srgbClr val="FFFFFF"/>
+                </a:solidFill>
+                <a:latin typeface="Times New Roman"/>
+                <a:ea typeface="Noto Sans CJK SC"/>
+              </a:rPr>
+              <a:t>应用</a:t>
+            </a:r>
+          </a:p>
+        </p:txBody>
+      </p:sp>
+      <p:cxnSp>
+        <p:nvCxnSpPr>
+          <p:cNvPr id="21" name="Connector 20"/>
+          <p:cNvCxnSpPr/>
+          <p:nvPr/>
+        </p:nvCxnSpPr>
+        <p:spPr>
+          <a:xfrm flipV="1">
+            <a:off x="8778020" y="2125979"/>
+            <a:ext cx="1860950" cy="891541"/>
+          </a:xfrm>
+          <a:prstGeom prst="line">
+            <a:avLst/>
+          </a:prstGeom>
+          <a:ln w="12700">
+            <a:solidFill>
+              <a:srgbClr val="C9D6CC"/>
+            </a:solidFill>
+          </a:ln>
+        </p:spPr>
+        <p:style>
+          <a:lnRef idx="2">
+            <a:schemeClr val="accent1"/>
+          </a:lnRef>
+          <a:fillRef idx="0">
+            <a:schemeClr val="accent1"/>
+          </a:fillRef>
+          <a:effectRef idx="1">
+            <a:schemeClr val="accent1"/>
+          </a:effectRef>
+          <a:fontRef idx="minor">
+            <a:schemeClr val="tx1"/>
+          </a:fontRef>
+        </p:style>
+      </p:cxnSp>
+      <p:sp>
+        <p:nvSpPr>
+          <p:cNvPr id="22" name="TextBox 21"/>
+          <p:cNvSpPr txBox="1"/>
+          <p:nvPr/>
+        </p:nvSpPr>
+        <p:spPr>
+          <a:xfrm>
             <a:off x="868680" y="1645920"/>
-            <a:ext cx="8046518" cy="2194560"/>
+            <a:ext cx="6095847" cy="2194560"/>
           </a:xfrm>
           <a:prstGeom prst="rect">
             <a:avLst/>
@@ -3392,7 +3967,7 @@
             <a:r>
               <a:rPr sz="3400" b="1" u="none">
                 <a:solidFill>
-                  <a:srgbClr val="0B6B5F"/>
+                  <a:srgbClr val="3F7A52"/>
                 </a:solidFill>
                 <a:latin typeface="Times New Roman"/>
                 <a:ea typeface="Noto Sans CJK SC"/>
@@ -3404,14 +3979,58 @@
       </p:sp>
       <p:sp>
         <p:nvSpPr>
-          <p:cNvPr id="9" name="TextBox 8"/>
+          <p:cNvPr id="23" name="Rectangle 22"/>
+          <p:cNvSpPr/>
+          <p:nvPr/>
+        </p:nvSpPr>
+        <p:spPr>
+          <a:xfrm>
+            <a:off x="896112" y="3977639"/>
+            <a:ext cx="5852013" cy="566928"/>
+          </a:xfrm>
+          <a:prstGeom prst="rect">
+            <a:avLst/>
+          </a:prstGeom>
+          <a:solidFill>
+            <a:srgbClr val="FFF2CC"/>
+          </a:solidFill>
+          <a:ln>
+            <a:noFill/>
+          </a:ln>
+          <a:effectLst/>
+        </p:spPr>
+        <p:style>
+          <a:lnRef idx="1">
+            <a:schemeClr val="accent1"/>
+          </a:lnRef>
+          <a:fillRef idx="3">
+            <a:schemeClr val="accent1"/>
+          </a:fillRef>
+          <a:effectRef idx="2">
+            <a:schemeClr val="accent1"/>
+          </a:effectRef>
+          <a:fontRef idx="minor">
+            <a:schemeClr val="lt1"/>
+          </a:fontRef>
+        </p:style>
+        <p:txBody>
+          <a:bodyPr rtlCol="0" anchor="ctr"/>
+          <a:lstStyle/>
+          <a:p>
+            <a:pPr algn="ctr"/>
+          </a:p>
+        </p:txBody>
+      </p:sp>
+      <p:sp>
+        <p:nvSpPr>
+          <p:cNvPr id="24" name="TextBox 23"/>
           <p:cNvSpPr txBox="1"/>
           <p:nvPr/>
         </p:nvSpPr>
         <p:spPr>
           <a:xfrm>
-            <a:off x="896112" y="3840480"/>
-            <a:ext cx="7315017" cy="731520"/>
+            <a:off x="1024128" y="4005072"/>
+            <a:ext cx="5486262" cy="512064"/>
           </a:xfrm>
           <a:prstGeom prst="rect">
             <a:avLst/>
@@ -3419,7 +4038,7 @@
           <a:noFill/>
         </p:spPr>
         <p:txBody>
-          <a:bodyPr wrap="square" anchor="t" lIns="54864" rIns="54864" tIns="0" bIns="0">
+          <a:bodyPr wrap="square" anchor="ctr" lIns="54864" rIns="54864" tIns="0" bIns="0">
             <a:spAutoFit/>
           </a:bodyPr>
           <a:lstStyle/>
@@ -3428,12 +4047,12 @@
               <a:lnSpc>
                 <a:spcPct val="130000"/>
               </a:lnSpc>
-              <a:defRPr sz="1900"/>
+              <a:defRPr sz="1700"/>
             </a:pPr>
             <a:r>
-              <a:rPr sz="1900" b="0" u="none">
-                <a:solidFill>
-                  <a:srgbClr val="3F5C57"/>
+              <a:rPr sz="1700" b="1" u="none">
+                <a:solidFill>
+                  <a:srgbClr val="1D2B22"/>
                 </a:solidFill>
                 <a:latin typeface="Times New Roman"/>
                 <a:ea typeface="Noto Sans CJK SC"/>
@@ -3445,14 +4064,14 @@
       </p:sp>
       <p:sp>
         <p:nvSpPr>
-          <p:cNvPr id="10" name="TextBox 9"/>
+          <p:cNvPr id="25" name="TextBox 24"/>
           <p:cNvSpPr txBox="1"/>
           <p:nvPr/>
         </p:nvSpPr>
         <p:spPr>
           <a:xfrm>
-            <a:off x="896112" y="4754880"/>
-            <a:ext cx="7315017" cy="457200"/>
+            <a:off x="896112" y="4892040"/>
+            <a:ext cx="5852013" cy="457200"/>
           </a:xfrm>
           <a:prstGeom prst="rect">
             <a:avLst/>
@@ -3486,13 +4105,13 @@
       </p:sp>
       <p:sp>
         <p:nvSpPr>
-          <p:cNvPr id="11" name="Rounded Rectangle 10"/>
+          <p:cNvPr id="26" name="Rounded Rectangle 25"/>
           <p:cNvSpPr/>
           <p:nvPr/>
         </p:nvSpPr>
         <p:spPr>
           <a:xfrm>
-            <a:off x="10637215" y="5760720"/>
+            <a:off x="896112" y="5760720"/>
             <a:ext cx="822960" cy="402336"/>
           </a:xfrm>
           <a:prstGeom prst="roundRect">
@@ -3501,7 +4120,7 @@
             </a:avLst>
           </a:prstGeom>
           <a:solidFill>
-            <a:srgbClr val="0B6B5F"/>
+            <a:srgbClr val="3F7A52"/>
           </a:solidFill>
           <a:ln>
             <a:noFill/>
@@ -3532,13 +4151,13 @@
       </p:sp>
       <p:sp>
         <p:nvSpPr>
-          <p:cNvPr id="12" name="TextBox 11"/>
+          <p:cNvPr id="27" name="TextBox 26"/>
           <p:cNvSpPr txBox="1"/>
           <p:nvPr/>
         </p:nvSpPr>
         <p:spPr>
           <a:xfrm>
-            <a:off x="10637215" y="5779008"/>
+            <a:off x="896112" y="5779008"/>
             <a:ext cx="822960" cy="365760"/>
           </a:xfrm>
           <a:prstGeom prst="rect">
@@ -3604,7 +4223,7 @@
             <a:avLst/>
           </a:prstGeom>
           <a:solidFill>
-            <a:srgbClr val="E9F6F2"/>
+            <a:srgbClr val="EAF3EC"/>
           </a:solidFill>
           <a:ln>
             <a:noFill/>
@@ -3648,7 +4267,7 @@
             <a:avLst/>
           </a:prstGeom>
           <a:solidFill>
-            <a:srgbClr val="0B6B5F"/>
+            <a:srgbClr val="3F7A52"/>
           </a:solidFill>
           <a:ln>
             <a:noFill/>
@@ -3692,7 +4311,7 @@
             <a:avLst/>
           </a:prstGeom>
           <a:solidFill>
-            <a:srgbClr val="12A48C"/>
+            <a:srgbClr val="70AD47"/>
           </a:solidFill>
           <a:ln>
             <a:noFill/>
@@ -3729,7 +4348,7 @@
         </p:nvSpPr>
         <p:spPr>
           <a:xfrm>
-            <a:off x="777240" y="731520"/>
+            <a:off x="777240" y="1005840"/>
             <a:ext cx="10637215" cy="822960"/>
           </a:xfrm>
           <a:prstGeom prst="rect">
@@ -3752,7 +4371,7 @@
             <a:r>
               <a:rPr sz="3800" b="1" u="none">
                 <a:solidFill>
-                  <a:srgbClr val="0B6B5F"/>
+                  <a:srgbClr val="3F7A52"/>
                 </a:solidFill>
                 <a:latin typeface="Times New Roman"/>
                 <a:ea typeface="Noto Sans CJK SC"/>
@@ -3770,8 +4389,8 @@
         </p:nvSpPr>
         <p:spPr>
           <a:xfrm>
-            <a:off x="868680" y="1783080"/>
-            <a:ext cx="10454335" cy="4251960"/>
+            <a:off x="868680" y="3136392"/>
+            <a:ext cx="10454335" cy="2715768"/>
           </a:xfrm>
           <a:prstGeom prst="rect">
             <a:avLst/>
@@ -3793,7 +4412,7 @@
             <a:r>
               <a:rPr sz="2300" b="0" u="none">
                 <a:solidFill>
-                  <a:srgbClr val="12A48C"/>
+                  <a:srgbClr val="70AD47"/>
                 </a:solidFill>
                 <a:latin typeface="Times New Roman"/>
                 <a:ea typeface="Noto Sans CJK SC"/>
@@ -3803,7 +4422,7 @@
             <a:r>
               <a:rPr sz="2300" b="0" u="none">
                 <a:solidFill>
-                  <a:srgbClr val="102622"/>
+                  <a:srgbClr val="1D2B22"/>
                 </a:solidFill>
                 <a:latin typeface="Times New Roman"/>
                 <a:ea typeface="Noto Sans CJK SC"/>
@@ -3823,7 +4442,7 @@
             <a:r>
               <a:rPr sz="2300" b="0" u="none">
                 <a:solidFill>
-                  <a:srgbClr val="12A48C"/>
+                  <a:srgbClr val="70AD47"/>
                 </a:solidFill>
                 <a:latin typeface="Times New Roman"/>
                 <a:ea typeface="Noto Sans CJK SC"/>
@@ -3833,7 +4452,7 @@
             <a:r>
               <a:rPr sz="2300" b="0" u="none">
                 <a:solidFill>
-                  <a:srgbClr val="102622"/>
+                  <a:srgbClr val="1D2B22"/>
                 </a:solidFill>
                 <a:latin typeface="Times New Roman"/>
                 <a:ea typeface="Noto Sans CJK SC"/>
@@ -3960,7 +4579,7 @@
           <a:noFill/>
           <a:ln w="15875">
             <a:solidFill>
-              <a:srgbClr val="D5EDE6"/>
+              <a:srgbClr val="DCEBE0"/>
             </a:solidFill>
           </a:ln>
           <a:effectLst/>
@@ -4004,7 +4623,7 @@
           <a:noFill/>
           <a:ln w="15875">
             <a:solidFill>
-              <a:srgbClr val="D5EDE6"/>
+              <a:srgbClr val="DCEBE0"/>
             </a:solidFill>
           </a:ln>
           <a:effectLst/>
@@ -4048,7 +4667,7 @@
           <a:noFill/>
           <a:ln w="15875">
             <a:solidFill>
-              <a:srgbClr val="D5EDE6"/>
+              <a:srgbClr val="DCEBE0"/>
             </a:solidFill>
           </a:ln>
           <a:effectLst/>
@@ -4077,20 +4696,22 @@
       </p:sp>
       <p:sp>
         <p:nvSpPr>
-          <p:cNvPr id="5" name="Rectangle 4"/>
+          <p:cNvPr id="5" name="Rounded Rectangle 4"/>
           <p:cNvSpPr/>
           <p:nvPr/>
         </p:nvSpPr>
         <p:spPr>
           <a:xfrm>
-            <a:off x="0" y="0"/>
-            <a:ext cx="12191695" cy="713232"/>
-          </a:xfrm>
-          <a:prstGeom prst="rect">
-            <a:avLst/>
+            <a:off x="548640" y="365760"/>
+            <a:ext cx="3346704" cy="566928"/>
+          </a:xfrm>
+          <a:prstGeom prst="roundRect">
+            <a:avLst>
+              <a:gd name="adj" fmla="val 10000"/>
+            </a:avLst>
           </a:prstGeom>
           <a:solidFill>
-            <a:srgbClr val="0B6B5F"/>
+            <a:srgbClr val="3F7A52"/>
           </a:solidFill>
           <a:ln>
             <a:noFill/>
@@ -4121,58 +4742,14 @@
       </p:sp>
       <p:sp>
         <p:nvSpPr>
-          <p:cNvPr id="6" name="Rectangle 5"/>
-          <p:cNvSpPr/>
-          <p:nvPr/>
-        </p:nvSpPr>
-        <p:spPr>
-          <a:xfrm>
-            <a:off x="0" y="713232"/>
-            <a:ext cx="12191695" cy="45720"/>
-          </a:xfrm>
-          <a:prstGeom prst="rect">
-            <a:avLst/>
-          </a:prstGeom>
-          <a:solidFill>
-            <a:srgbClr val="12A48C"/>
-          </a:solidFill>
-          <a:ln>
-            <a:noFill/>
-          </a:ln>
-          <a:effectLst/>
-        </p:spPr>
-        <p:style>
-          <a:lnRef idx="1">
-            <a:schemeClr val="accent1"/>
-          </a:lnRef>
-          <a:fillRef idx="3">
-            <a:schemeClr val="accent1"/>
-          </a:fillRef>
-          <a:effectRef idx="2">
-            <a:schemeClr val="accent1"/>
-          </a:effectRef>
-          <a:fontRef idx="minor">
-            <a:schemeClr val="lt1"/>
-          </a:fontRef>
-        </p:style>
-        <p:txBody>
-          <a:bodyPr rtlCol="0" anchor="ctr"/>
-          <a:lstStyle/>
-          <a:p>
-            <a:pPr algn="ctr"/>
-          </a:p>
-        </p:txBody>
-      </p:sp>
-      <p:sp>
-        <p:nvSpPr>
-          <p:cNvPr id="7" name="TextBox 6"/>
+          <p:cNvPr id="6" name="TextBox 5"/>
           <p:cNvSpPr txBox="1"/>
           <p:nvPr/>
         </p:nvSpPr>
         <p:spPr>
           <a:xfrm>
-            <a:off x="548640" y="109728"/>
-            <a:ext cx="8899855" cy="493776"/>
+            <a:off x="548640" y="384048"/>
+            <a:ext cx="3346704" cy="530352"/>
           </a:xfrm>
           <a:prstGeom prst="rect">
             <a:avLst/>
@@ -4185,14 +4762,14 @@
           </a:bodyPr>
           <a:lstStyle/>
           <a:p>
-            <a:pPr algn="l">
+            <a:pPr algn="ctr">
               <a:lnSpc>
                 <a:spcPct val="130000"/>
               </a:lnSpc>
-              <a:defRPr sz="2800"/>
+              <a:defRPr sz="2300"/>
             </a:pPr>
             <a:r>
-              <a:rPr sz="2800" b="1" u="none">
+              <a:rPr sz="2300" b="1" u="none">
                 <a:solidFill>
                   <a:srgbClr val="FFFFFF"/>
                 </a:solidFill>
@@ -4206,7 +4783,7 @@
       </p:sp>
       <p:sp>
         <p:nvSpPr>
-          <p:cNvPr id="8" name="TextBox 7"/>
+          <p:cNvPr id="7" name="TextBox 6"/>
           <p:cNvSpPr txBox="1"/>
           <p:nvPr/>
         </p:nvSpPr>
@@ -4235,7 +4812,7 @@
             <a:r>
               <a:rPr sz="2400" b="0" u="none">
                 <a:solidFill>
-                  <a:srgbClr val="102622"/>
+                  <a:srgbClr val="1D2B22"/>
                 </a:solidFill>
                 <a:latin typeface="Times New Roman"/>
                 <a:ea typeface="Noto Sans CJK SC"/>
@@ -4245,7 +4822,7 @@
             <a:r>
               <a:rPr sz="2400" b="0" u="sng">
                 <a:solidFill>
-                  <a:srgbClr val="102622"/>
+                  <a:srgbClr val="1D2B22"/>
                 </a:solidFill>
                 <a:latin typeface="Times New Roman"/>
                 <a:ea typeface="Noto Sans CJK SC"/>
@@ -4255,7 +4832,7 @@
             <a:r>
               <a:rPr sz="2400" b="0" u="none">
                 <a:solidFill>
-                  <a:srgbClr val="102622"/>
+                  <a:srgbClr val="1D2B22"/>
                 </a:solidFill>
                 <a:latin typeface="Times New Roman"/>
                 <a:ea typeface="Noto Sans CJK SC"/>
@@ -4265,7 +4842,7 @@
             <a:r>
               <a:rPr sz="2400" b="0" u="sng">
                 <a:solidFill>
-                  <a:srgbClr val="102622"/>
+                  <a:srgbClr val="1D2B22"/>
                 </a:solidFill>
                 <a:latin typeface="Times New Roman"/>
                 <a:ea typeface="Noto Sans CJK SC"/>
@@ -4275,7 +4852,7 @@
             <a:r>
               <a:rPr sz="2400" b="0" u="none">
                 <a:solidFill>
-                  <a:srgbClr val="102622"/>
+                  <a:srgbClr val="1D2B22"/>
                 </a:solidFill>
                 <a:latin typeface="Times New Roman"/>
                 <a:ea typeface="Noto Sans CJK SC"/>
@@ -4295,7 +4872,7 @@
             <a:r>
               <a:rPr sz="2400" b="0" u="none">
                 <a:solidFill>
-                  <a:srgbClr val="102622"/>
+                  <a:srgbClr val="1D2B22"/>
                 </a:solidFill>
                 <a:latin typeface="Times New Roman"/>
                 <a:ea typeface="Noto Sans CJK SC"/>
@@ -4305,7 +4882,7 @@
             <a:r>
               <a:rPr sz="2400" b="0" u="sng">
                 <a:solidFill>
-                  <a:srgbClr val="102622"/>
+                  <a:srgbClr val="1D2B22"/>
                 </a:solidFill>
                 <a:latin typeface="Times New Roman"/>
                 <a:ea typeface="Noto Sans CJK SC"/>
@@ -4315,12 +4892,12 @@
             <a:r>
               <a:rPr sz="2400" b="0" u="none">
                 <a:solidFill>
-                  <a:srgbClr val="102622"/>
-                </a:solidFill>
-                <a:latin typeface="Times New Roman"/>
-                <a:ea typeface="Noto Sans CJK SC"/>
-              </a:rPr>
-              <a:t> 构成基本支架，蛋白质 molecule 镶嵌、贯穿或覆盖其中。</a:t>
+                  <a:srgbClr val="1D2B22"/>
+                </a:solidFill>
+                <a:latin typeface="Times New Roman"/>
+                <a:ea typeface="Noto Sans CJK SC"/>
+              </a:rPr>
+              <a:t> 构成基本支架，蛋白质分子镶嵌、贯穿或覆盖其中。</a:t>
             </a:r>
           </a:p>
           <a:p>
@@ -4335,7 +4912,7 @@
             <a:r>
               <a:rPr sz="2400" b="0" u="none">
                 <a:solidFill>
-                  <a:srgbClr val="102622"/>
+                  <a:srgbClr val="1D2B22"/>
                 </a:solidFill>
                 <a:latin typeface="Times New Roman"/>
                 <a:ea typeface="Noto Sans CJK SC"/>
@@ -4345,7 +4922,7 @@
             <a:r>
               <a:rPr sz="2400" b="0" u="sng">
                 <a:solidFill>
-                  <a:srgbClr val="102622"/>
+                  <a:srgbClr val="1D2B22"/>
                 </a:solidFill>
                 <a:latin typeface="Times New Roman"/>
                 <a:ea typeface="Noto Sans CJK SC"/>
@@ -4355,7 +4932,7 @@
             <a:r>
               <a:rPr sz="2400" b="0" u="none">
                 <a:solidFill>
-                  <a:srgbClr val="102622"/>
+                  <a:srgbClr val="1D2B22"/>
                 </a:solidFill>
                 <a:latin typeface="Times New Roman"/>
                 <a:ea typeface="Noto Sans CJK SC"/>
@@ -4365,7 +4942,7 @@
             <a:r>
               <a:rPr sz="2400" b="0" u="sng">
                 <a:solidFill>
-                  <a:srgbClr val="102622"/>
+                  <a:srgbClr val="1D2B22"/>
                 </a:solidFill>
                 <a:latin typeface="Times New Roman"/>
                 <a:ea typeface="Noto Sans CJK SC"/>
@@ -4375,7 +4952,7 @@
             <a:r>
               <a:rPr sz="2400" b="0" u="none">
                 <a:solidFill>
-                  <a:srgbClr val="102622"/>
+                  <a:srgbClr val="1D2B22"/>
                 </a:solidFill>
                 <a:latin typeface="Times New Roman"/>
                 <a:ea typeface="Noto Sans CJK SC"/>
@@ -4395,7 +4972,7 @@
             <a:r>
               <a:rPr sz="2400" b="0" u="none">
                 <a:solidFill>
-                  <a:srgbClr val="12A48C"/>
+                  <a:srgbClr val="70AD47"/>
                 </a:solidFill>
                 <a:latin typeface="Times New Roman"/>
                 <a:ea typeface="Noto Sans CJK SC"/>
@@ -4405,7 +4982,7 @@
             <a:r>
               <a:rPr sz="2400" b="0" u="none">
                 <a:solidFill>
-                  <a:srgbClr val="102622"/>
+                  <a:srgbClr val="1D2B22"/>
                 </a:solidFill>
                 <a:latin typeface="Times New Roman"/>
                 <a:ea typeface="Noto Sans CJK SC"/>
@@ -4425,7 +5002,7 @@
             <a:r>
               <a:rPr sz="2400" b="0" u="none">
                 <a:solidFill>
-                  <a:srgbClr val="102622"/>
+                  <a:srgbClr val="1D2B22"/>
                 </a:solidFill>
                 <a:latin typeface="Times New Roman"/>
                 <a:ea typeface="Noto Sans CJK SC"/>
@@ -4445,7 +5022,7 @@
             <a:r>
               <a:rPr sz="2400" b="0" u="none">
                 <a:solidFill>
-                  <a:srgbClr val="102622"/>
+                  <a:srgbClr val="1D2B22"/>
                 </a:solidFill>
                 <a:latin typeface="Times New Roman"/>
                 <a:ea typeface="Noto Sans CJK SC"/>
@@ -4457,7 +5034,7 @@
       </p:sp>
       <p:sp>
         <p:nvSpPr>
-          <p:cNvPr id="9" name="Rectangle 8"/>
+          <p:cNvPr id="8" name="Rectangle 7"/>
           <p:cNvSpPr/>
           <p:nvPr/>
         </p:nvSpPr>
@@ -4470,7 +5047,7 @@
             <a:avLst/>
           </a:prstGeom>
           <a:solidFill>
-            <a:srgbClr val="12A48C"/>
+            <a:srgbClr val="70AD47"/>
           </a:solidFill>
           <a:ln>
             <a:noFill/>
@@ -4501,14 +5078,14 @@
       </p:sp>
       <p:sp>
         <p:nvSpPr>
-          <p:cNvPr id="10" name="TextBox 9"/>
+          <p:cNvPr id="9" name="TextBox 8"/>
           <p:cNvSpPr txBox="1"/>
           <p:nvPr/>
         </p:nvSpPr>
         <p:spPr>
           <a:xfrm>
             <a:off x="548640" y="6345936"/>
-            <a:ext cx="8595360" cy="274320"/>
+            <a:ext cx="7498079" cy="274320"/>
           </a:xfrm>
           <a:prstGeom prst="rect">
             <a:avLst/>
@@ -4542,7 +5119,7 @@
       </p:sp>
       <p:sp>
         <p:nvSpPr>
-          <p:cNvPr id="11" name="TextBox 10"/>
+          <p:cNvPr id="10" name="TextBox 9"/>
           <p:cNvSpPr txBox="1"/>
           <p:nvPr/>
         </p:nvSpPr>
@@ -4616,7 +5193,7 @@
           <a:noFill/>
           <a:ln w="15875">
             <a:solidFill>
-              <a:srgbClr val="D5EDE6"/>
+              <a:srgbClr val="DCEBE0"/>
             </a:solidFill>
           </a:ln>
           <a:effectLst/>
@@ -4660,7 +5237,7 @@
           <a:noFill/>
           <a:ln w="15875">
             <a:solidFill>
-              <a:srgbClr val="D5EDE6"/>
+              <a:srgbClr val="DCEBE0"/>
             </a:solidFill>
           </a:ln>
           <a:effectLst/>
@@ -4704,7 +5281,7 @@
           <a:noFill/>
           <a:ln w="15875">
             <a:solidFill>
-              <a:srgbClr val="D5EDE6"/>
+              <a:srgbClr val="DCEBE0"/>
             </a:solidFill>
           </a:ln>
           <a:effectLst/>
@@ -4733,20 +5310,22 @@
       </p:sp>
       <p:sp>
         <p:nvSpPr>
-          <p:cNvPr id="5" name="Rectangle 4"/>
+          <p:cNvPr id="5" name="Rounded Rectangle 4"/>
           <p:cNvSpPr/>
           <p:nvPr/>
         </p:nvSpPr>
         <p:spPr>
           <a:xfrm>
-            <a:off x="0" y="0"/>
-            <a:ext cx="12191695" cy="713232"/>
-          </a:xfrm>
-          <a:prstGeom prst="rect">
-            <a:avLst/>
+            <a:off x="548640" y="365760"/>
+            <a:ext cx="4279392" cy="566928"/>
+          </a:xfrm>
+          <a:prstGeom prst="roundRect">
+            <a:avLst>
+              <a:gd name="adj" fmla="val 10000"/>
+            </a:avLst>
           </a:prstGeom>
           <a:solidFill>
-            <a:srgbClr val="0B6B5F"/>
+            <a:srgbClr val="3F7A52"/>
           </a:solidFill>
           <a:ln>
             <a:noFill/>
@@ -4777,20 +5356,63 @@
       </p:sp>
       <p:sp>
         <p:nvSpPr>
-          <p:cNvPr id="6" name="Rectangle 5"/>
+          <p:cNvPr id="6" name="TextBox 5"/>
+          <p:cNvSpPr txBox="1"/>
+          <p:nvPr/>
+        </p:nvSpPr>
+        <p:spPr>
+          <a:xfrm>
+            <a:off x="548640" y="384048"/>
+            <a:ext cx="4279392" cy="530352"/>
+          </a:xfrm>
+          <a:prstGeom prst="rect">
+            <a:avLst/>
+          </a:prstGeom>
+          <a:noFill/>
+        </p:spPr>
+        <p:txBody>
+          <a:bodyPr wrap="square" anchor="ctr" lIns="54864" rIns="54864" tIns="0" bIns="0">
+            <a:spAutoFit/>
+          </a:bodyPr>
+          <a:lstStyle/>
+          <a:p>
+            <a:pPr algn="ctr">
+              <a:lnSpc>
+                <a:spcPct val="130000"/>
+              </a:lnSpc>
+              <a:defRPr sz="2300"/>
+            </a:pPr>
+            <a:r>
+              <a:rPr sz="2300" b="1" u="none">
+                <a:solidFill>
+                  <a:srgbClr val="FFFFFF"/>
+                </a:solidFill>
+                <a:latin typeface="Times New Roman"/>
+                <a:ea typeface="Noto Sans CJK SC"/>
+              </a:rPr>
+              <a:t>必备知识•精读教材｜概念</a:t>
+            </a:r>
+          </a:p>
+        </p:txBody>
+      </p:sp>
+      <p:sp>
+        <p:nvSpPr>
+          <p:cNvPr id="7" name="Rounded Rectangle 6"/>
           <p:cNvSpPr/>
           <p:nvPr/>
         </p:nvSpPr>
         <p:spPr>
           <a:xfrm>
-            <a:off x="0" y="713232"/>
-            <a:ext cx="12191695" cy="45720"/>
-          </a:xfrm>
-          <a:prstGeom prst="rect">
-            <a:avLst/>
+            <a:off x="5029200" y="457200"/>
+            <a:ext cx="768096" cy="384048"/>
+          </a:xfrm>
+          <a:prstGeom prst="roundRect">
+            <a:avLst>
+              <a:gd name="adj" fmla="val 28000"/>
+            </a:avLst>
           </a:prstGeom>
           <a:solidFill>
-            <a:srgbClr val="12A48C"/>
+            <a:srgbClr val="FFF2CC"/>
           </a:solidFill>
           <a:ln>
             <a:noFill/>
@@ -4821,14 +5443,14 @@
       </p:sp>
       <p:sp>
         <p:nvSpPr>
-          <p:cNvPr id="7" name="TextBox 6"/>
+          <p:cNvPr id="8" name="TextBox 7"/>
           <p:cNvSpPr txBox="1"/>
           <p:nvPr/>
         </p:nvSpPr>
         <p:spPr>
           <a:xfrm>
-            <a:off x="548640" y="109728"/>
-            <a:ext cx="8899855" cy="493776"/>
+            <a:off x="5029200" y="475488"/>
+            <a:ext cx="768096" cy="347472"/>
           </a:xfrm>
           <a:prstGeom prst="rect">
             <a:avLst/>
@@ -4841,43 +5463,43 @@
           </a:bodyPr>
           <a:lstStyle/>
           <a:p>
-            <a:pPr algn="l">
+            <a:pPr algn="ctr">
               <a:lnSpc>
                 <a:spcPct val="130000"/>
               </a:lnSpc>
-              <a:defRPr sz="2800"/>
+              <a:defRPr sz="1200"/>
             </a:pPr>
             <a:r>
-              <a:rPr sz="2800" b="1" u="none">
-                <a:solidFill>
-                  <a:srgbClr val="FFFFFF"/>
-                </a:solidFill>
-                <a:latin typeface="Times New Roman"/>
-                <a:ea typeface="Noto Sans CJK SC"/>
-              </a:rPr>
-              <a:t>必备知识•精读教材｜概念</a:t>
-            </a:r>
-          </a:p>
-        </p:txBody>
-      </p:sp>
-      <p:sp>
-        <p:nvSpPr>
-          <p:cNvPr id="8" name="Rounded Rectangle 7"/>
+              <a:rPr sz="1200" b="1" u="none">
+                <a:solidFill>
+                  <a:srgbClr val="8A6D1B"/>
+                </a:solidFill>
+                <a:latin typeface="Times New Roman"/>
+                <a:ea typeface="Noto Sans CJK SC"/>
+              </a:rPr>
+              <a:t>归纳</a:t>
+            </a:r>
+          </a:p>
+        </p:txBody>
+      </p:sp>
+      <p:sp>
+        <p:nvSpPr>
+          <p:cNvPr id="9" name="Rounded Rectangle 8"/>
           <p:cNvSpPr/>
           <p:nvPr/>
         </p:nvSpPr>
         <p:spPr>
           <a:xfrm>
-            <a:off x="11012119" y="173736"/>
-            <a:ext cx="676656" cy="365760"/>
+            <a:off x="4952847" y="1325880"/>
+            <a:ext cx="2286000" cy="713232"/>
           </a:xfrm>
           <a:prstGeom prst="roundRect">
             <a:avLst>
-              <a:gd name="adj" fmla="val 30000"/>
+              <a:gd name="adj" fmla="val 18000"/>
             </a:avLst>
           </a:prstGeom>
           <a:solidFill>
-            <a:srgbClr val="12A48C"/>
+            <a:srgbClr val="3F7A52"/>
           </a:solidFill>
           <a:ln>
             <a:noFill/>
@@ -4908,94 +5530,7 @@
       </p:sp>
       <p:sp>
         <p:nvSpPr>
-          <p:cNvPr id="9" name="TextBox 8"/>
-          <p:cNvSpPr txBox="1"/>
-          <p:nvPr/>
-        </p:nvSpPr>
-        <p:spPr>
-          <a:xfrm>
-            <a:off x="11012119" y="192024"/>
-            <a:ext cx="676656" cy="329184"/>
-          </a:xfrm>
-          <a:prstGeom prst="rect">
-            <a:avLst/>
-          </a:prstGeom>
-          <a:noFill/>
-        </p:spPr>
-        <p:txBody>
-          <a:bodyPr wrap="square" anchor="ctr" lIns="54864" rIns="54864" tIns="0" bIns="0">
-            <a:spAutoFit/>
-          </a:bodyPr>
-          <a:lstStyle/>
-          <a:p>
-            <a:pPr algn="ctr">
-              <a:lnSpc>
-                <a:spcPct val="130000"/>
-              </a:lnSpc>
-              <a:defRPr sz="1100"/>
-            </a:pPr>
-            <a:r>
-              <a:rPr sz="1100" b="1" u="none">
-                <a:solidFill>
-                  <a:srgbClr val="FFFFFF"/>
-                </a:solidFill>
-                <a:latin typeface="Times New Roman"/>
-                <a:ea typeface="Noto Sans CJK SC"/>
-              </a:rPr>
-              <a:t>归纳</a:t>
-            </a:r>
-          </a:p>
-        </p:txBody>
-      </p:sp>
-      <p:sp>
-        <p:nvSpPr>
-          <p:cNvPr id="10" name="Rounded Rectangle 9"/>
-          <p:cNvSpPr/>
-          <p:nvPr/>
-        </p:nvSpPr>
-        <p:spPr>
-          <a:xfrm>
-            <a:off x="4952847" y="1325880"/>
-            <a:ext cx="2286000" cy="713232"/>
-          </a:xfrm>
-          <a:prstGeom prst="roundRect">
-            <a:avLst>
-              <a:gd name="adj" fmla="val 18000"/>
-            </a:avLst>
-          </a:prstGeom>
-          <a:solidFill>
-            <a:srgbClr val="0B6B5F"/>
-          </a:solidFill>
-          <a:ln>
-            <a:noFill/>
-          </a:ln>
-          <a:effectLst/>
-        </p:spPr>
-        <p:style>
-          <a:lnRef idx="1">
-            <a:schemeClr val="accent1"/>
-          </a:lnRef>
-          <a:fillRef idx="3">
-            <a:schemeClr val="accent1"/>
-          </a:fillRef>
-          <a:effectRef idx="2">
-            <a:schemeClr val="accent1"/>
-          </a:effectRef>
-          <a:fontRef idx="minor">
-            <a:schemeClr val="lt1"/>
-          </a:fontRef>
-        </p:style>
-        <p:txBody>
-          <a:bodyPr rtlCol="0" anchor="ctr"/>
-          <a:lstStyle/>
-          <a:p>
-            <a:pPr algn="ctr"/>
-          </a:p>
-        </p:txBody>
-      </p:sp>
-      <p:sp>
-        <p:nvSpPr>
-          <p:cNvPr id="11" name="TextBox 10"/>
+          <p:cNvPr id="10" name="TextBox 9"/>
           <p:cNvSpPr txBox="1"/>
           <p:nvPr/>
         </p:nvSpPr>
@@ -5036,7 +5571,7 @@
       </p:sp>
       <p:sp>
         <p:nvSpPr>
-          <p:cNvPr id="12" name="Rectangle 11"/>
+          <p:cNvPr id="11" name="Rectangle 10"/>
           <p:cNvSpPr/>
           <p:nvPr/>
         </p:nvSpPr>
@@ -5049,7 +5584,7 @@
             <a:avLst/>
           </a:prstGeom>
           <a:solidFill>
-            <a:srgbClr val="12A48C"/>
+            <a:srgbClr val="70AD47"/>
           </a:solidFill>
           <a:ln>
             <a:noFill/>
@@ -5080,7 +5615,7 @@
       </p:sp>
       <p:sp>
         <p:nvSpPr>
-          <p:cNvPr id="13" name="Rectangle 12"/>
+          <p:cNvPr id="12" name="Rectangle 11"/>
           <p:cNvSpPr/>
           <p:nvPr/>
         </p:nvSpPr>
@@ -5093,7 +5628,7 @@
             <a:avLst/>
           </a:prstGeom>
           <a:solidFill>
-            <a:srgbClr val="12A48C"/>
+            <a:srgbClr val="70AD47"/>
           </a:solidFill>
           <a:ln>
             <a:noFill/>
@@ -5124,7 +5659,7 @@
       </p:sp>
       <p:sp>
         <p:nvSpPr>
-          <p:cNvPr id="14" name="Rectangle 13"/>
+          <p:cNvPr id="13" name="Rectangle 12"/>
           <p:cNvSpPr/>
           <p:nvPr/>
         </p:nvSpPr>
@@ -5137,7 +5672,7 @@
             <a:avLst/>
           </a:prstGeom>
           <a:solidFill>
-            <a:srgbClr val="12A48C"/>
+            <a:srgbClr val="70AD47"/>
           </a:solidFill>
           <a:ln>
             <a:noFill/>
@@ -5168,7 +5703,7 @@
       </p:sp>
       <p:sp>
         <p:nvSpPr>
-          <p:cNvPr id="15" name="Rounded Rectangle 14"/>
+          <p:cNvPr id="14" name="Rounded Rectangle 13"/>
           <p:cNvSpPr/>
           <p:nvPr/>
         </p:nvSpPr>
@@ -5183,7 +5718,7 @@
             </a:avLst>
           </a:prstGeom>
           <a:solidFill>
-            <a:srgbClr val="E9F6F2"/>
+            <a:srgbClr val="EAF3EC"/>
           </a:solidFill>
           <a:ln>
             <a:noFill/>
@@ -5214,7 +5749,7 @@
       </p:sp>
       <p:sp>
         <p:nvSpPr>
-          <p:cNvPr id="16" name="TextBox 15"/>
+          <p:cNvPr id="15" name="TextBox 14"/>
           <p:cNvSpPr txBox="1"/>
           <p:nvPr/>
         </p:nvSpPr>
@@ -5243,7 +5778,7 @@
             <a:r>
               <a:rPr sz="1500" b="1" u="none">
                 <a:solidFill>
-                  <a:srgbClr val="0B6B5F"/>
+                  <a:srgbClr val="3F7A52"/>
                 </a:solidFill>
                 <a:latin typeface="Times New Roman"/>
                 <a:ea typeface="Noto Sans CJK SC"/>
@@ -5255,7 +5790,7 @@
       </p:sp>
       <p:sp>
         <p:nvSpPr>
-          <p:cNvPr id="17" name="TextBox 16"/>
+          <p:cNvPr id="16" name="TextBox 15"/>
           <p:cNvSpPr txBox="1"/>
           <p:nvPr/>
         </p:nvSpPr>
@@ -5284,7 +5819,7 @@
             <a:r>
               <a:rPr sz="1400" b="0" u="none">
                 <a:solidFill>
-                  <a:srgbClr val="12A48C"/>
+                  <a:srgbClr val="70AD47"/>
                 </a:solidFill>
                 <a:latin typeface="Times New Roman"/>
                 <a:ea typeface="Noto Sans CJK SC"/>
@@ -5294,7 +5829,7 @@
             <a:r>
               <a:rPr sz="1400" b="0" u="none">
                 <a:solidFill>
-                  <a:srgbClr val="102622"/>
+                  <a:srgbClr val="1D2B22"/>
                 </a:solidFill>
                 <a:latin typeface="Times New Roman"/>
                 <a:ea typeface="Noto Sans CJK SC"/>
@@ -5314,7 +5849,7 @@
             <a:r>
               <a:rPr sz="1400" b="0" u="none">
                 <a:solidFill>
-                  <a:srgbClr val="12A48C"/>
+                  <a:srgbClr val="70AD47"/>
                 </a:solidFill>
                 <a:latin typeface="Times New Roman"/>
                 <a:ea typeface="Noto Sans CJK SC"/>
@@ -5324,7 +5859,7 @@
             <a:r>
               <a:rPr sz="1400" b="0" u="none">
                 <a:solidFill>
-                  <a:srgbClr val="102622"/>
+                  <a:srgbClr val="1D2B22"/>
                 </a:solidFill>
                 <a:latin typeface="Times New Roman"/>
                 <a:ea typeface="Noto Sans CJK SC"/>
@@ -5344,7 +5879,7 @@
             <a:r>
               <a:rPr sz="1400" b="0" u="none">
                 <a:solidFill>
-                  <a:srgbClr val="12A48C"/>
+                  <a:srgbClr val="70AD47"/>
                 </a:solidFill>
                 <a:latin typeface="Times New Roman"/>
                 <a:ea typeface="Noto Sans CJK SC"/>
@@ -5354,7 +5889,7 @@
             <a:r>
               <a:rPr sz="1400" b="0" u="none">
                 <a:solidFill>
-                  <a:srgbClr val="102622"/>
+                  <a:srgbClr val="1D2B22"/>
                 </a:solidFill>
                 <a:latin typeface="Times New Roman"/>
                 <a:ea typeface="Noto Sans CJK SC"/>
@@ -5366,7 +5901,7 @@
       </p:sp>
       <p:sp>
         <p:nvSpPr>
-          <p:cNvPr id="18" name="Rectangle 17"/>
+          <p:cNvPr id="17" name="Rectangle 16"/>
           <p:cNvSpPr/>
           <p:nvPr/>
         </p:nvSpPr>
@@ -5379,7 +5914,7 @@
             <a:avLst/>
           </a:prstGeom>
           <a:solidFill>
-            <a:srgbClr val="12A48C"/>
+            <a:srgbClr val="70AD47"/>
           </a:solidFill>
           <a:ln>
             <a:noFill/>
@@ -5410,7 +5945,7 @@
       </p:sp>
       <p:sp>
         <p:nvSpPr>
-          <p:cNvPr id="19" name="Rounded Rectangle 18"/>
+          <p:cNvPr id="18" name="Rounded Rectangle 17"/>
           <p:cNvSpPr/>
           <p:nvPr/>
         </p:nvSpPr>
@@ -5425,7 +5960,7 @@
             </a:avLst>
           </a:prstGeom>
           <a:solidFill>
-            <a:srgbClr val="E9F6F2"/>
+            <a:srgbClr val="EAF3EC"/>
           </a:solidFill>
           <a:ln>
             <a:noFill/>
@@ -5456,7 +5991,7 @@
       </p:sp>
       <p:sp>
         <p:nvSpPr>
-          <p:cNvPr id="20" name="TextBox 19"/>
+          <p:cNvPr id="19" name="TextBox 18"/>
           <p:cNvSpPr txBox="1"/>
           <p:nvPr/>
         </p:nvSpPr>
@@ -5485,7 +6020,7 @@
             <a:r>
               <a:rPr sz="1500" b="1" u="none">
                 <a:solidFill>
-                  <a:srgbClr val="0B6B5F"/>
+                  <a:srgbClr val="3F7A52"/>
                 </a:solidFill>
                 <a:latin typeface="Times New Roman"/>
                 <a:ea typeface="Noto Sans CJK SC"/>
@@ -5497,7 +6032,7 @@
       </p:sp>
       <p:sp>
         <p:nvSpPr>
-          <p:cNvPr id="21" name="TextBox 20"/>
+          <p:cNvPr id="20" name="TextBox 19"/>
           <p:cNvSpPr txBox="1"/>
           <p:nvPr/>
         </p:nvSpPr>
@@ -5526,7 +6061,7 @@
             <a:r>
               <a:rPr sz="1400" b="0" u="none">
                 <a:solidFill>
-                  <a:srgbClr val="12A48C"/>
+                  <a:srgbClr val="70AD47"/>
                 </a:solidFill>
                 <a:latin typeface="Times New Roman"/>
                 <a:ea typeface="Noto Sans CJK SC"/>
@@ -5536,7 +6071,7 @@
             <a:r>
               <a:rPr sz="1400" b="0" u="none">
                 <a:solidFill>
-                  <a:srgbClr val="102622"/>
+                  <a:srgbClr val="1D2B22"/>
                 </a:solidFill>
                 <a:latin typeface="Times New Roman"/>
                 <a:ea typeface="Noto Sans CJK SC"/>
@@ -5556,7 +6091,7 @@
             <a:r>
               <a:rPr sz="1400" b="0" u="none">
                 <a:solidFill>
-                  <a:srgbClr val="12A48C"/>
+                  <a:srgbClr val="70AD47"/>
                 </a:solidFill>
                 <a:latin typeface="Times New Roman"/>
                 <a:ea typeface="Noto Sans CJK SC"/>
@@ -5566,7 +6101,7 @@
             <a:r>
               <a:rPr sz="1400" b="0" u="none">
                 <a:solidFill>
-                  <a:srgbClr val="102622"/>
+                  <a:srgbClr val="1D2B22"/>
                 </a:solidFill>
                 <a:latin typeface="Times New Roman"/>
                 <a:ea typeface="Noto Sans CJK SC"/>
@@ -5586,7 +6121,7 @@
             <a:r>
               <a:rPr sz="1400" b="0" u="none">
                 <a:solidFill>
-                  <a:srgbClr val="12A48C"/>
+                  <a:srgbClr val="70AD47"/>
                 </a:solidFill>
                 <a:latin typeface="Times New Roman"/>
                 <a:ea typeface="Noto Sans CJK SC"/>
@@ -5596,7 +6131,7 @@
             <a:r>
               <a:rPr sz="1400" b="0" u="none">
                 <a:solidFill>
-                  <a:srgbClr val="102622"/>
+                  <a:srgbClr val="1D2B22"/>
                 </a:solidFill>
                 <a:latin typeface="Times New Roman"/>
                 <a:ea typeface="Noto Sans CJK SC"/>
@@ -5608,7 +6143,7 @@
       </p:sp>
       <p:sp>
         <p:nvSpPr>
-          <p:cNvPr id="22" name="Rectangle 21"/>
+          <p:cNvPr id="21" name="Rectangle 20"/>
           <p:cNvSpPr/>
           <p:nvPr/>
         </p:nvSpPr>
@@ -5621,7 +6156,7 @@
             <a:avLst/>
           </a:prstGeom>
           <a:solidFill>
-            <a:srgbClr val="12A48C"/>
+            <a:srgbClr val="70AD47"/>
           </a:solidFill>
           <a:ln>
             <a:noFill/>
@@ -5652,7 +6187,7 @@
       </p:sp>
       <p:sp>
         <p:nvSpPr>
-          <p:cNvPr id="23" name="Rounded Rectangle 22"/>
+          <p:cNvPr id="22" name="Rounded Rectangle 21"/>
           <p:cNvSpPr/>
           <p:nvPr/>
         </p:nvSpPr>
@@ -5667,7 +6202,7 @@
             </a:avLst>
           </a:prstGeom>
           <a:solidFill>
-            <a:srgbClr val="E9F6F2"/>
+            <a:srgbClr val="EAF3EC"/>
           </a:solidFill>
           <a:ln>
             <a:noFill/>
@@ -5698,7 +6233,7 @@
       </p:sp>
       <p:sp>
         <p:nvSpPr>
-          <p:cNvPr id="24" name="TextBox 23"/>
+          <p:cNvPr id="23" name="TextBox 22"/>
           <p:cNvSpPr txBox="1"/>
           <p:nvPr/>
         </p:nvSpPr>
@@ -5727,7 +6262,7 @@
             <a:r>
               <a:rPr sz="1500" b="1" u="none">
                 <a:solidFill>
-                  <a:srgbClr val="0B6B5F"/>
+                  <a:srgbClr val="3F7A52"/>
                 </a:solidFill>
                 <a:latin typeface="Times New Roman"/>
                 <a:ea typeface="Noto Sans CJK SC"/>
@@ -5739,7 +6274,7 @@
       </p:sp>
       <p:sp>
         <p:nvSpPr>
-          <p:cNvPr id="25" name="TextBox 24"/>
+          <p:cNvPr id="24" name="TextBox 23"/>
           <p:cNvSpPr txBox="1"/>
           <p:nvPr/>
         </p:nvSpPr>
@@ -5768,7 +6303,7 @@
             <a:r>
               <a:rPr sz="1400" b="0" u="none">
                 <a:solidFill>
-                  <a:srgbClr val="12A48C"/>
+                  <a:srgbClr val="70AD47"/>
                 </a:solidFill>
                 <a:latin typeface="Times New Roman"/>
                 <a:ea typeface="Noto Sans CJK SC"/>
@@ -5778,7 +6313,7 @@
             <a:r>
               <a:rPr sz="1400" b="0" u="none">
                 <a:solidFill>
-                  <a:srgbClr val="102622"/>
+                  <a:srgbClr val="1D2B22"/>
                 </a:solidFill>
                 <a:latin typeface="Times New Roman"/>
                 <a:ea typeface="Noto Sans CJK SC"/>
@@ -5798,7 +6333,7 @@
             <a:r>
               <a:rPr sz="1400" b="0" u="none">
                 <a:solidFill>
-                  <a:srgbClr val="12A48C"/>
+                  <a:srgbClr val="70AD47"/>
                 </a:solidFill>
                 <a:latin typeface="Times New Roman"/>
                 <a:ea typeface="Noto Sans CJK SC"/>
@@ -5808,7 +6343,7 @@
             <a:r>
               <a:rPr sz="1400" b="0" u="none">
                 <a:solidFill>
-                  <a:srgbClr val="102622"/>
+                  <a:srgbClr val="1D2B22"/>
                 </a:solidFill>
                 <a:latin typeface="Times New Roman"/>
                 <a:ea typeface="Noto Sans CJK SC"/>
@@ -5820,7 +6355,7 @@
       </p:sp>
       <p:sp>
         <p:nvSpPr>
-          <p:cNvPr id="26" name="Rectangle 25"/>
+          <p:cNvPr id="25" name="Rectangle 24"/>
           <p:cNvSpPr/>
           <p:nvPr/>
         </p:nvSpPr>
@@ -5833,7 +6368,7 @@
             <a:avLst/>
           </a:prstGeom>
           <a:solidFill>
-            <a:srgbClr val="12A48C"/>
+            <a:srgbClr val="70AD47"/>
           </a:solidFill>
           <a:ln>
             <a:noFill/>
@@ -5864,7 +6399,7 @@
       </p:sp>
       <p:sp>
         <p:nvSpPr>
-          <p:cNvPr id="27" name="Rounded Rectangle 26"/>
+          <p:cNvPr id="26" name="Rounded Rectangle 25"/>
           <p:cNvSpPr/>
           <p:nvPr/>
         </p:nvSpPr>
@@ -5879,7 +6414,7 @@
             </a:avLst>
           </a:prstGeom>
           <a:solidFill>
-            <a:srgbClr val="E9F6F2"/>
+            <a:srgbClr val="EAF3EC"/>
           </a:solidFill>
           <a:ln>
             <a:noFill/>
@@ -5910,7 +6445,7 @@
       </p:sp>
       <p:sp>
         <p:nvSpPr>
-          <p:cNvPr id="28" name="TextBox 27"/>
+          <p:cNvPr id="27" name="TextBox 26"/>
           <p:cNvSpPr txBox="1"/>
           <p:nvPr/>
         </p:nvSpPr>
@@ -5939,7 +6474,7 @@
             <a:r>
               <a:rPr sz="1500" b="1" u="none">
                 <a:solidFill>
-                  <a:srgbClr val="0B6B5F"/>
+                  <a:srgbClr val="3F7A52"/>
                 </a:solidFill>
                 <a:latin typeface="Times New Roman"/>
                 <a:ea typeface="Noto Sans CJK SC"/>
@@ -5951,7 +6486,7 @@
       </p:sp>
       <p:sp>
         <p:nvSpPr>
-          <p:cNvPr id="29" name="TextBox 28"/>
+          <p:cNvPr id="28" name="TextBox 27"/>
           <p:cNvSpPr txBox="1"/>
           <p:nvPr/>
         </p:nvSpPr>
@@ -5980,7 +6515,7 @@
             <a:r>
               <a:rPr sz="1400" b="0" u="none">
                 <a:solidFill>
-                  <a:srgbClr val="12A48C"/>
+                  <a:srgbClr val="70AD47"/>
                 </a:solidFill>
                 <a:latin typeface="Times New Roman"/>
                 <a:ea typeface="Noto Sans CJK SC"/>
@@ -5990,7 +6525,7 @@
             <a:r>
               <a:rPr sz="1400" b="0" u="none">
                 <a:solidFill>
-                  <a:srgbClr val="102622"/>
+                  <a:srgbClr val="1D2B22"/>
                 </a:solidFill>
                 <a:latin typeface="Times New Roman"/>
                 <a:ea typeface="Noto Sans CJK SC"/>
@@ -6010,7 +6545,7 @@
             <a:r>
               <a:rPr sz="1400" b="0" u="none">
                 <a:solidFill>
-                  <a:srgbClr val="12A48C"/>
+                  <a:srgbClr val="70AD47"/>
                 </a:solidFill>
                 <a:latin typeface="Times New Roman"/>
                 <a:ea typeface="Noto Sans CJK SC"/>
@@ -6020,7 +6555,7 @@
             <a:r>
               <a:rPr sz="1400" b="0" u="none">
                 <a:solidFill>
-                  <a:srgbClr val="102622"/>
+                  <a:srgbClr val="1D2B22"/>
                 </a:solidFill>
                 <a:latin typeface="Times New Roman"/>
                 <a:ea typeface="Noto Sans CJK SC"/>
@@ -6040,7 +6575,7 @@
             <a:r>
               <a:rPr sz="1400" b="0" u="none">
                 <a:solidFill>
-                  <a:srgbClr val="12A48C"/>
+                  <a:srgbClr val="70AD47"/>
                 </a:solidFill>
                 <a:latin typeface="Times New Roman"/>
                 <a:ea typeface="Noto Sans CJK SC"/>
@@ -6050,7 +6585,7 @@
             <a:r>
               <a:rPr sz="1400" b="0" u="none">
                 <a:solidFill>
-                  <a:srgbClr val="102622"/>
+                  <a:srgbClr val="1D2B22"/>
                 </a:solidFill>
                 <a:latin typeface="Times New Roman"/>
                 <a:ea typeface="Noto Sans CJK SC"/>
@@ -6062,7 +6597,7 @@
       </p:sp>
       <p:sp>
         <p:nvSpPr>
-          <p:cNvPr id="30" name="Rectangle 29"/>
+          <p:cNvPr id="29" name="Rectangle 28"/>
           <p:cNvSpPr/>
           <p:nvPr/>
         </p:nvSpPr>
@@ -6075,7 +6610,7 @@
             <a:avLst/>
           </a:prstGeom>
           <a:solidFill>
-            <a:srgbClr val="12A48C"/>
+            <a:srgbClr val="70AD47"/>
           </a:solidFill>
           <a:ln>
             <a:noFill/>
@@ -6106,14 +6641,14 @@
       </p:sp>
       <p:sp>
         <p:nvSpPr>
-          <p:cNvPr id="31" name="TextBox 30"/>
+          <p:cNvPr id="30" name="TextBox 29"/>
           <p:cNvSpPr txBox="1"/>
           <p:nvPr/>
         </p:nvSpPr>
         <p:spPr>
           <a:xfrm>
             <a:off x="548640" y="6345936"/>
-            <a:ext cx="8595360" cy="274320"/>
+            <a:ext cx="7498079" cy="274320"/>
           </a:xfrm>
           <a:prstGeom prst="rect">
             <a:avLst/>
@@ -6147,7 +6682,7 @@
       </p:sp>
       <p:sp>
         <p:nvSpPr>
-          <p:cNvPr id="32" name="TextBox 31"/>
+          <p:cNvPr id="31" name="TextBox 30"/>
           <p:cNvSpPr txBox="1"/>
           <p:nvPr/>
         </p:nvSpPr>
@@ -6221,7 +6756,7 @@
           <a:noFill/>
           <a:ln w="15875">
             <a:solidFill>
-              <a:srgbClr val="D5EDE6"/>
+              <a:srgbClr val="DCEBE0"/>
             </a:solidFill>
           </a:ln>
           <a:effectLst/>
@@ -6265,7 +6800,7 @@
           <a:noFill/>
           <a:ln w="15875">
             <a:solidFill>
-              <a:srgbClr val="D5EDE6"/>
+              <a:srgbClr val="DCEBE0"/>
             </a:solidFill>
           </a:ln>
           <a:effectLst/>
@@ -6309,7 +6844,7 @@
           <a:noFill/>
           <a:ln w="15875">
             <a:solidFill>
-              <a:srgbClr val="D5EDE6"/>
+              <a:srgbClr val="DCEBE0"/>
             </a:solidFill>
           </a:ln>
           <a:effectLst/>
@@ -6338,20 +6873,22 @@
       </p:sp>
       <p:sp>
         <p:nvSpPr>
-          <p:cNvPr id="5" name="Rectangle 4"/>
+          <p:cNvPr id="5" name="Rounded Rectangle 4"/>
           <p:cNvSpPr/>
           <p:nvPr/>
         </p:nvSpPr>
         <p:spPr>
           <a:xfrm>
-            <a:off x="0" y="0"/>
-            <a:ext cx="12191695" cy="713232"/>
-          </a:xfrm>
-          <a:prstGeom prst="rect">
-            <a:avLst/>
+            <a:off x="548640" y="365760"/>
+            <a:ext cx="3346704" cy="566928"/>
+          </a:xfrm>
+          <a:prstGeom prst="roundRect">
+            <a:avLst>
+              <a:gd name="adj" fmla="val 10000"/>
+            </a:avLst>
           </a:prstGeom>
           <a:solidFill>
-            <a:srgbClr val="0B6B5F"/>
+            <a:srgbClr val="3F7A52"/>
           </a:solidFill>
           <a:ln>
             <a:noFill/>
@@ -6382,58 +6919,14 @@
       </p:sp>
       <p:sp>
         <p:nvSpPr>
-          <p:cNvPr id="6" name="Rectangle 5"/>
-          <p:cNvSpPr/>
-          <p:nvPr/>
-        </p:nvSpPr>
-        <p:spPr>
-          <a:xfrm>
-            <a:off x="0" y="713232"/>
-            <a:ext cx="12191695" cy="45720"/>
-          </a:xfrm>
-          <a:prstGeom prst="rect">
-            <a:avLst/>
-          </a:prstGeom>
-          <a:solidFill>
-            <a:srgbClr val="12A48C"/>
-          </a:solidFill>
-          <a:ln>
-            <a:noFill/>
-          </a:ln>
-          <a:effectLst/>
-        </p:spPr>
-        <p:style>
-          <a:lnRef idx="1">
-            <a:schemeClr val="accent1"/>
-          </a:lnRef>
-          <a:fillRef idx="3">
-            <a:schemeClr val="accent1"/>
-          </a:fillRef>
-          <a:effectRef idx="2">
-            <a:schemeClr val="accent1"/>
-          </a:effectRef>
-          <a:fontRef idx="minor">
-            <a:schemeClr val="lt1"/>
-          </a:fontRef>
-        </p:style>
-        <p:txBody>
-          <a:bodyPr rtlCol="0" anchor="ctr"/>
-          <a:lstStyle/>
-          <a:p>
-            <a:pPr algn="ctr"/>
-          </a:p>
-        </p:txBody>
-      </p:sp>
-      <p:sp>
-        <p:nvSpPr>
-          <p:cNvPr id="7" name="TextBox 6"/>
+          <p:cNvPr id="6" name="TextBox 5"/>
           <p:cNvSpPr txBox="1"/>
           <p:nvPr/>
         </p:nvSpPr>
         <p:spPr>
           <a:xfrm>
-            <a:off x="548640" y="109728"/>
-            <a:ext cx="8899855" cy="493776"/>
+            <a:off x="548640" y="384048"/>
+            <a:ext cx="3346704" cy="530352"/>
           </a:xfrm>
           <a:prstGeom prst="rect">
             <a:avLst/>
@@ -6446,14 +6939,14 @@
           </a:bodyPr>
           <a:lstStyle/>
           <a:p>
-            <a:pPr algn="l">
+            <a:pPr algn="ctr">
               <a:lnSpc>
                 <a:spcPct val="130000"/>
               </a:lnSpc>
-              <a:defRPr sz="2800"/>
+              <a:defRPr sz="2300"/>
             </a:pPr>
             <a:r>
-              <a:rPr sz="2800" b="1" u="none">
+              <a:rPr sz="2300" b="1" u="none">
                 <a:solidFill>
                   <a:srgbClr val="FFFFFF"/>
                 </a:solidFill>
@@ -6467,7 +6960,7 @@
       </p:sp>
       <p:sp>
         <p:nvSpPr>
-          <p:cNvPr id="8" name="TextBox 7"/>
+          <p:cNvPr id="7" name="TextBox 6"/>
           <p:cNvSpPr txBox="1"/>
           <p:nvPr/>
         </p:nvSpPr>
@@ -6496,7 +6989,7 @@
             <a:r>
               <a:rPr sz="2400" b="0" u="none">
                 <a:solidFill>
-                  <a:srgbClr val="102622"/>
+                  <a:srgbClr val="1D2B22"/>
                 </a:solidFill>
                 <a:latin typeface="Times New Roman"/>
                 <a:ea typeface="Noto Sans CJK SC"/>
@@ -6516,7 +7009,7 @@
             <a:r>
               <a:rPr sz="2400" b="0" u="none">
                 <a:solidFill>
-                  <a:srgbClr val="12A48C"/>
+                  <a:srgbClr val="70AD47"/>
                 </a:solidFill>
                 <a:latin typeface="Times New Roman"/>
                 <a:ea typeface="Noto Sans CJK SC"/>
@@ -6526,7 +7019,7 @@
             <a:r>
               <a:rPr sz="2400" b="0" u="none">
                 <a:solidFill>
-                  <a:srgbClr val="102622"/>
+                  <a:srgbClr val="1D2B22"/>
                 </a:solidFill>
                 <a:latin typeface="Times New Roman"/>
                 <a:ea typeface="Noto Sans CJK SC"/>
@@ -6538,7 +7031,7 @@
       </p:sp>
       <p:sp>
         <p:nvSpPr>
-          <p:cNvPr id="9" name="Rectangle 8"/>
+          <p:cNvPr id="8" name="Rectangle 7"/>
           <p:cNvSpPr/>
           <p:nvPr/>
         </p:nvSpPr>
@@ -6551,7 +7044,7 @@
             <a:avLst/>
           </a:prstGeom>
           <a:solidFill>
-            <a:srgbClr val="12A48C"/>
+            <a:srgbClr val="70AD47"/>
           </a:solidFill>
           <a:ln>
             <a:noFill/>
@@ -6582,14 +7075,14 @@
       </p:sp>
       <p:sp>
         <p:nvSpPr>
-          <p:cNvPr id="10" name="TextBox 9"/>
+          <p:cNvPr id="9" name="TextBox 8"/>
           <p:cNvSpPr txBox="1"/>
           <p:nvPr/>
         </p:nvSpPr>
         <p:spPr>
           <a:xfrm>
             <a:off x="548640" y="6345936"/>
-            <a:ext cx="8595360" cy="274320"/>
+            <a:ext cx="7498079" cy="274320"/>
           </a:xfrm>
           <a:prstGeom prst="rect">
             <a:avLst/>
@@ -6623,7 +7116,7 @@
       </p:sp>
       <p:sp>
         <p:nvSpPr>
-          <p:cNvPr id="11" name="TextBox 10"/>
+          <p:cNvPr id="10" name="TextBox 9"/>
           <p:cNvSpPr txBox="1"/>
           <p:nvPr/>
         </p:nvSpPr>
@@ -6697,7 +7190,7 @@
           <a:noFill/>
           <a:ln w="15875">
             <a:solidFill>
-              <a:srgbClr val="D5EDE6"/>
+              <a:srgbClr val="DCEBE0"/>
             </a:solidFill>
           </a:ln>
           <a:effectLst/>
@@ -6741,7 +7234,7 @@
           <a:noFill/>
           <a:ln w="15875">
             <a:solidFill>
-              <a:srgbClr val="D5EDE6"/>
+              <a:srgbClr val="DCEBE0"/>
             </a:solidFill>
           </a:ln>
           <a:effectLst/>
@@ -6785,7 +7278,7 @@
           <a:noFill/>
           <a:ln w="15875">
             <a:solidFill>
-              <a:srgbClr val="D5EDE6"/>
+              <a:srgbClr val="DCEBE0"/>
             </a:solidFill>
           </a:ln>
           <a:effectLst/>
@@ -6814,20 +7307,22 @@
       </p:sp>
       <p:sp>
         <p:nvSpPr>
-          <p:cNvPr id="5" name="Rectangle 4"/>
+          <p:cNvPr id="5" name="Rounded Rectangle 4"/>
           <p:cNvSpPr/>
           <p:nvPr/>
         </p:nvSpPr>
         <p:spPr>
           <a:xfrm>
-            <a:off x="0" y="0"/>
-            <a:ext cx="12191695" cy="713232"/>
-          </a:xfrm>
-          <a:prstGeom prst="rect">
-            <a:avLst/>
+            <a:off x="548640" y="365760"/>
+            <a:ext cx="4279392" cy="566928"/>
+          </a:xfrm>
+          <a:prstGeom prst="roundRect">
+            <a:avLst>
+              <a:gd name="adj" fmla="val 10000"/>
+            </a:avLst>
           </a:prstGeom>
           <a:solidFill>
-            <a:srgbClr val="0B6B5F"/>
+            <a:srgbClr val="3F7A52"/>
           </a:solidFill>
           <a:ln>
             <a:noFill/>
@@ -6858,58 +7353,14 @@
       </p:sp>
       <p:sp>
         <p:nvSpPr>
-          <p:cNvPr id="6" name="Rectangle 5"/>
-          <p:cNvSpPr/>
-          <p:nvPr/>
-        </p:nvSpPr>
-        <p:spPr>
-          <a:xfrm>
-            <a:off x="0" y="713232"/>
-            <a:ext cx="12191695" cy="45720"/>
-          </a:xfrm>
-          <a:prstGeom prst="rect">
-            <a:avLst/>
-          </a:prstGeom>
-          <a:solidFill>
-            <a:srgbClr val="12A48C"/>
-          </a:solidFill>
-          <a:ln>
-            <a:noFill/>
-          </a:ln>
-          <a:effectLst/>
-        </p:spPr>
-        <p:style>
-          <a:lnRef idx="1">
-            <a:schemeClr val="accent1"/>
-          </a:lnRef>
-          <a:fillRef idx="3">
-            <a:schemeClr val="accent1"/>
-          </a:fillRef>
-          <a:effectRef idx="2">
-            <a:schemeClr val="accent1"/>
-          </a:effectRef>
-          <a:fontRef idx="minor">
-            <a:schemeClr val="lt1"/>
-          </a:fontRef>
-        </p:style>
-        <p:txBody>
-          <a:bodyPr rtlCol="0" anchor="ctr"/>
-          <a:lstStyle/>
-          <a:p>
-            <a:pPr algn="ctr"/>
-          </a:p>
-        </p:txBody>
-      </p:sp>
-      <p:sp>
-        <p:nvSpPr>
-          <p:cNvPr id="7" name="TextBox 6"/>
+          <p:cNvPr id="6" name="TextBox 5"/>
           <p:cNvSpPr txBox="1"/>
           <p:nvPr/>
         </p:nvSpPr>
         <p:spPr>
           <a:xfrm>
-            <a:off x="548640" y="109728"/>
-            <a:ext cx="8899855" cy="493776"/>
+            <a:off x="548640" y="384048"/>
+            <a:ext cx="4279392" cy="530352"/>
           </a:xfrm>
           <a:prstGeom prst="rect">
             <a:avLst/>
@@ -6922,14 +7373,14 @@
           </a:bodyPr>
           <a:lstStyle/>
           <a:p>
-            <a:pPr algn="l">
+            <a:pPr algn="ctr">
               <a:lnSpc>
                 <a:spcPct val="130000"/>
               </a:lnSpc>
-              <a:defRPr sz="2800"/>
+              <a:defRPr sz="2300"/>
             </a:pPr>
             <a:r>
-              <a:rPr sz="2800" b="1" u="none">
+              <a:rPr sz="2300" b="1" u="none">
                 <a:solidFill>
                   <a:srgbClr val="FFFFFF"/>
                 </a:solidFill>
@@ -6943,7 +7394,7 @@
       </p:sp>
       <p:sp>
         <p:nvSpPr>
-          <p:cNvPr id="8" name="Rectangle 7"/>
+          <p:cNvPr id="7" name="Rectangle 6"/>
           <p:cNvSpPr/>
           <p:nvPr/>
         </p:nvSpPr>
@@ -6987,7 +7438,7 @@
       </p:sp>
       <p:sp>
         <p:nvSpPr>
-          <p:cNvPr id="9" name="TextBox 8"/>
+          <p:cNvPr id="8" name="TextBox 7"/>
           <p:cNvSpPr txBox="1"/>
           <p:nvPr/>
         </p:nvSpPr>
@@ -7016,7 +7467,7 @@
             <a:r>
               <a:rPr sz="1400" b="1" u="none">
                 <a:solidFill>
-                  <a:srgbClr val="0B6B5F"/>
+                  <a:srgbClr val="3F7A52"/>
                 </a:solidFill>
                 <a:latin typeface="Times New Roman"/>
                 <a:ea typeface="Noto Sans CJK SC"/>
@@ -7028,7 +7479,7 @@
       </p:sp>
       <p:sp>
         <p:nvSpPr>
-          <p:cNvPr id="10" name="TextBox 9"/>
+          <p:cNvPr id="9" name="TextBox 8"/>
           <p:cNvSpPr txBox="1"/>
           <p:nvPr/>
         </p:nvSpPr>
@@ -7057,7 +7508,7 @@
             <a:r>
               <a:rPr sz="1900" b="0" u="none">
                 <a:solidFill>
-                  <a:srgbClr val="102622"/>
+                  <a:srgbClr val="1D2B22"/>
                 </a:solidFill>
                 <a:latin typeface="Times New Roman"/>
                 <a:ea typeface="Noto Sans CJK SC"/>
@@ -7069,7 +7520,7 @@
       </p:sp>
       <p:sp>
         <p:nvSpPr>
-          <p:cNvPr id="11" name="TextBox 10"/>
+          <p:cNvPr id="10" name="TextBox 9"/>
           <p:cNvSpPr txBox="1"/>
           <p:nvPr/>
         </p:nvSpPr>
@@ -7098,7 +7549,7 @@
             <a:r>
               <a:rPr sz="1400" b="1" u="none">
                 <a:solidFill>
-                  <a:srgbClr val="12A48C"/>
+                  <a:srgbClr val="70AD47"/>
                 </a:solidFill>
                 <a:latin typeface="Times New Roman"/>
                 <a:ea typeface="Noto Sans CJK SC"/>
@@ -7110,7 +7561,7 @@
       </p:sp>
       <p:sp>
         <p:nvSpPr>
-          <p:cNvPr id="12" name="TextBox 11"/>
+          <p:cNvPr id="11" name="TextBox 10"/>
           <p:cNvSpPr txBox="1"/>
           <p:nvPr/>
         </p:nvSpPr>
@@ -7139,7 +7590,7 @@
             <a:r>
               <a:rPr sz="1900" b="0" u="none">
                 <a:solidFill>
-                  <a:srgbClr val="102622"/>
+                  <a:srgbClr val="1D2B22"/>
                 </a:solidFill>
                 <a:latin typeface="Times New Roman"/>
                 <a:ea typeface="Noto Sans CJK SC"/>
@@ -7151,7 +7602,7 @@
       </p:sp>
       <p:sp>
         <p:nvSpPr>
-          <p:cNvPr id="13" name="Rectangle 12"/>
+          <p:cNvPr id="12" name="Rectangle 11"/>
           <p:cNvSpPr/>
           <p:nvPr/>
         </p:nvSpPr>
@@ -7164,7 +7615,7 @@
             <a:avLst/>
           </a:prstGeom>
           <a:solidFill>
-            <a:srgbClr val="12A48C"/>
+            <a:srgbClr val="70AD47"/>
           </a:solidFill>
           <a:ln>
             <a:noFill/>
@@ -7195,14 +7646,14 @@
       </p:sp>
       <p:sp>
         <p:nvSpPr>
-          <p:cNvPr id="14" name="TextBox 13"/>
+          <p:cNvPr id="13" name="TextBox 12"/>
           <p:cNvSpPr txBox="1"/>
           <p:nvPr/>
         </p:nvSpPr>
         <p:spPr>
           <a:xfrm>
             <a:off x="548640" y="6345936"/>
-            <a:ext cx="8595360" cy="274320"/>
+            <a:ext cx="7498079" cy="274320"/>
           </a:xfrm>
           <a:prstGeom prst="rect">
             <a:avLst/>
@@ -7236,7 +7687,7 @@
       </p:sp>
       <p:sp>
         <p:nvSpPr>
-          <p:cNvPr id="15" name="TextBox 14"/>
+          <p:cNvPr id="14" name="TextBox 13"/>
           <p:cNvSpPr txBox="1"/>
           <p:nvPr/>
         </p:nvSpPr>
@@ -7310,7 +7761,7 @@
           <a:noFill/>
           <a:ln w="15875">
             <a:solidFill>
-              <a:srgbClr val="D5EDE6"/>
+              <a:srgbClr val="DCEBE0"/>
             </a:solidFill>
           </a:ln>
           <a:effectLst/>
@@ -7354,7 +7805,7 @@
           <a:noFill/>
           <a:ln w="15875">
             <a:solidFill>
-              <a:srgbClr val="D5EDE6"/>
+              <a:srgbClr val="DCEBE0"/>
             </a:solidFill>
           </a:ln>
           <a:effectLst/>
@@ -7398,7 +7849,7 @@
           <a:noFill/>
           <a:ln w="15875">
             <a:solidFill>
-              <a:srgbClr val="D5EDE6"/>
+              <a:srgbClr val="DCEBE0"/>
             </a:solidFill>
           </a:ln>
           <a:effectLst/>
@@ -7427,20 +7878,22 @@
       </p:sp>
       <p:sp>
         <p:nvSpPr>
-          <p:cNvPr id="5" name="Rectangle 4"/>
+          <p:cNvPr id="5" name="Rounded Rectangle 4"/>
           <p:cNvSpPr/>
           <p:nvPr/>
         </p:nvSpPr>
         <p:spPr>
           <a:xfrm>
-            <a:off x="0" y="0"/>
-            <a:ext cx="12191695" cy="713232"/>
-          </a:xfrm>
-          <a:prstGeom prst="rect">
-            <a:avLst/>
+            <a:off x="548640" y="365760"/>
+            <a:ext cx="3346704" cy="566928"/>
+          </a:xfrm>
+          <a:prstGeom prst="roundRect">
+            <a:avLst>
+              <a:gd name="adj" fmla="val 10000"/>
+            </a:avLst>
           </a:prstGeom>
           <a:solidFill>
-            <a:srgbClr val="0B6B5F"/>
+            <a:srgbClr val="3F7A52"/>
           </a:solidFill>
           <a:ln>
             <a:noFill/>
@@ -7471,58 +7924,14 @@
       </p:sp>
       <p:sp>
         <p:nvSpPr>
-          <p:cNvPr id="6" name="Rectangle 5"/>
-          <p:cNvSpPr/>
-          <p:nvPr/>
-        </p:nvSpPr>
-        <p:spPr>
-          <a:xfrm>
-            <a:off x="0" y="713232"/>
-            <a:ext cx="12191695" cy="45720"/>
-          </a:xfrm>
-          <a:prstGeom prst="rect">
-            <a:avLst/>
-          </a:prstGeom>
-          <a:solidFill>
-            <a:srgbClr val="12A48C"/>
-          </a:solidFill>
-          <a:ln>
-            <a:noFill/>
-          </a:ln>
-          <a:effectLst/>
-        </p:spPr>
-        <p:style>
-          <a:lnRef idx="1">
-            <a:schemeClr val="accent1"/>
-          </a:lnRef>
-          <a:fillRef idx="3">
-            <a:schemeClr val="accent1"/>
-          </a:fillRef>
-          <a:effectRef idx="2">
-            <a:schemeClr val="accent1"/>
-          </a:effectRef>
-          <a:fontRef idx="minor">
-            <a:schemeClr val="lt1"/>
-          </a:fontRef>
-        </p:style>
-        <p:txBody>
-          <a:bodyPr rtlCol="0" anchor="ctr"/>
-          <a:lstStyle/>
-          <a:p>
-            <a:pPr algn="ctr"/>
-          </a:p>
-        </p:txBody>
-      </p:sp>
-      <p:sp>
-        <p:nvSpPr>
-          <p:cNvPr id="7" name="TextBox 6"/>
+          <p:cNvPr id="6" name="TextBox 5"/>
           <p:cNvSpPr txBox="1"/>
           <p:nvPr/>
         </p:nvSpPr>
         <p:spPr>
           <a:xfrm>
-            <a:off x="548640" y="109728"/>
-            <a:ext cx="8899855" cy="493776"/>
+            <a:off x="548640" y="384048"/>
+            <a:ext cx="3346704" cy="530352"/>
           </a:xfrm>
           <a:prstGeom prst="rect">
             <a:avLst/>
@@ -7535,14 +7944,14 @@
           </a:bodyPr>
           <a:lstStyle/>
           <a:p>
-            <a:pPr algn="l">
+            <a:pPr algn="ctr">
               <a:lnSpc>
                 <a:spcPct val="130000"/>
               </a:lnSpc>
-              <a:defRPr sz="2800"/>
+              <a:defRPr sz="2300"/>
             </a:pPr>
             <a:r>
-              <a:rPr sz="2800" b="1" u="none">
+              <a:rPr sz="2300" b="1" u="none">
                 <a:solidFill>
                   <a:srgbClr val="FFFFFF"/>
                 </a:solidFill>
@@ -7556,7 +7965,7 @@
       </p:sp>
       <p:sp>
         <p:nvSpPr>
-          <p:cNvPr id="8" name="TextBox 7"/>
+          <p:cNvPr id="7" name="TextBox 6"/>
           <p:cNvSpPr txBox="1"/>
           <p:nvPr/>
         </p:nvSpPr>
@@ -7585,7 +7994,7 @@
             <a:r>
               <a:rPr sz="2600" b="0" u="none">
                 <a:solidFill>
-                  <a:srgbClr val="102622"/>
+                  <a:srgbClr val="1D2B22"/>
                 </a:solidFill>
                 <a:latin typeface="Times New Roman"/>
                 <a:ea typeface="Noto Sans CJK SC"/>
@@ -7605,7 +8014,7 @@
             <a:r>
               <a:rPr sz="2600" b="0" u="none">
                 <a:solidFill>
-                  <a:srgbClr val="12A48C"/>
+                  <a:srgbClr val="70AD47"/>
                 </a:solidFill>
                 <a:latin typeface="Times New Roman"/>
                 <a:ea typeface="Noto Sans CJK SC"/>
@@ -7615,7 +8024,7 @@
             <a:r>
               <a:rPr sz="2600" b="0" u="none">
                 <a:solidFill>
-                  <a:srgbClr val="102622"/>
+                  <a:srgbClr val="1D2B22"/>
                 </a:solidFill>
                 <a:latin typeface="Times New Roman"/>
                 <a:ea typeface="Noto Sans CJK SC"/>
@@ -7627,7 +8036,7 @@
       </p:sp>
       <p:sp>
         <p:nvSpPr>
-          <p:cNvPr id="9" name="Rectangle 8"/>
+          <p:cNvPr id="8" name="Rectangle 7"/>
           <p:cNvSpPr/>
           <p:nvPr/>
         </p:nvSpPr>
@@ -7640,7 +8049,7 @@
             <a:avLst/>
           </a:prstGeom>
           <a:solidFill>
-            <a:srgbClr val="12A48C"/>
+            <a:srgbClr val="70AD47"/>
           </a:solidFill>
           <a:ln>
             <a:noFill/>
@@ -7671,14 +8080,14 @@
       </p:sp>
       <p:sp>
         <p:nvSpPr>
-          <p:cNvPr id="10" name="TextBox 9"/>
+          <p:cNvPr id="9" name="TextBox 8"/>
           <p:cNvSpPr txBox="1"/>
           <p:nvPr/>
         </p:nvSpPr>
         <p:spPr>
           <a:xfrm>
             <a:off x="548640" y="6345936"/>
-            <a:ext cx="8595360" cy="274320"/>
+            <a:ext cx="7498079" cy="274320"/>
           </a:xfrm>
           <a:prstGeom prst="rect">
             <a:avLst/>
@@ -7712,7 +8121,7 @@
       </p:sp>
       <p:sp>
         <p:nvSpPr>
-          <p:cNvPr id="11" name="TextBox 10"/>
+          <p:cNvPr id="10" name="TextBox 9"/>
           <p:cNvSpPr txBox="1"/>
           <p:nvPr/>
         </p:nvSpPr>
@@ -7786,7 +8195,7 @@
           <a:noFill/>
           <a:ln w="15875">
             <a:solidFill>
-              <a:srgbClr val="D5EDE6"/>
+              <a:srgbClr val="DCEBE0"/>
             </a:solidFill>
           </a:ln>
           <a:effectLst/>
@@ -7830,7 +8239,7 @@
           <a:noFill/>
           <a:ln w="15875">
             <a:solidFill>
-              <a:srgbClr val="D5EDE6"/>
+              <a:srgbClr val="DCEBE0"/>
             </a:solidFill>
           </a:ln>
           <a:effectLst/>
@@ -7874,7 +8283,7 @@
           <a:noFill/>
           <a:ln w="15875">
             <a:solidFill>
-              <a:srgbClr val="D5EDE6"/>
+              <a:srgbClr val="DCEBE0"/>
             </a:solidFill>
           </a:ln>
           <a:effectLst/>
@@ -7903,20 +8312,22 @@
       </p:sp>
       <p:sp>
         <p:nvSpPr>
-          <p:cNvPr id="5" name="Rectangle 4"/>
+          <p:cNvPr id="5" name="Rounded Rectangle 4"/>
           <p:cNvSpPr/>
           <p:nvPr/>
         </p:nvSpPr>
         <p:spPr>
           <a:xfrm>
-            <a:off x="0" y="0"/>
-            <a:ext cx="12191695" cy="713232"/>
-          </a:xfrm>
-          <a:prstGeom prst="rect">
-            <a:avLst/>
+            <a:off x="548640" y="365760"/>
+            <a:ext cx="1792224" cy="566928"/>
+          </a:xfrm>
+          <a:prstGeom prst="roundRect">
+            <a:avLst>
+              <a:gd name="adj" fmla="val 10000"/>
+            </a:avLst>
           </a:prstGeom>
           <a:solidFill>
-            <a:srgbClr val="0B6B5F"/>
+            <a:srgbClr val="3F7A52"/>
           </a:solidFill>
           <a:ln>
             <a:noFill/>
@@ -7947,58 +8358,14 @@
       </p:sp>
       <p:sp>
         <p:nvSpPr>
-          <p:cNvPr id="6" name="Rectangle 5"/>
-          <p:cNvSpPr/>
-          <p:nvPr/>
-        </p:nvSpPr>
-        <p:spPr>
-          <a:xfrm>
-            <a:off x="0" y="713232"/>
-            <a:ext cx="12191695" cy="45720"/>
-          </a:xfrm>
-          <a:prstGeom prst="rect">
-            <a:avLst/>
-          </a:prstGeom>
-          <a:solidFill>
-            <a:srgbClr val="12A48C"/>
-          </a:solidFill>
-          <a:ln>
-            <a:noFill/>
-          </a:ln>
-          <a:effectLst/>
-        </p:spPr>
-        <p:style>
-          <a:lnRef idx="1">
-            <a:schemeClr val="accent1"/>
-          </a:lnRef>
-          <a:fillRef idx="3">
-            <a:schemeClr val="accent1"/>
-          </a:fillRef>
-          <a:effectRef idx="2">
-            <a:schemeClr val="accent1"/>
-          </a:effectRef>
-          <a:fontRef idx="minor">
-            <a:schemeClr val="lt1"/>
-          </a:fontRef>
-        </p:style>
-        <p:txBody>
-          <a:bodyPr rtlCol="0" anchor="ctr"/>
-          <a:lstStyle/>
-          <a:p>
-            <a:pPr algn="ctr"/>
-          </a:p>
-        </p:txBody>
-      </p:sp>
-      <p:sp>
-        <p:nvSpPr>
-          <p:cNvPr id="7" name="TextBox 6"/>
+          <p:cNvPr id="6" name="TextBox 5"/>
           <p:cNvSpPr txBox="1"/>
           <p:nvPr/>
         </p:nvSpPr>
         <p:spPr>
           <a:xfrm>
-            <a:off x="548640" y="109728"/>
-            <a:ext cx="8899855" cy="493776"/>
+            <a:off x="548640" y="384048"/>
+            <a:ext cx="1792224" cy="530352"/>
           </a:xfrm>
           <a:prstGeom prst="rect">
             <a:avLst/>
@@ -8011,14 +8378,14 @@
           </a:bodyPr>
           <a:lstStyle/>
           <a:p>
-            <a:pPr algn="l">
+            <a:pPr algn="ctr">
               <a:lnSpc>
                 <a:spcPct val="130000"/>
               </a:lnSpc>
-              <a:defRPr sz="2800"/>
+              <a:defRPr sz="2300"/>
             </a:pPr>
             <a:r>
-              <a:rPr sz="2800" b="1" u="none">
+              <a:rPr sz="2300" b="1" u="none">
                 <a:solidFill>
                   <a:srgbClr val="FFFFFF"/>
                 </a:solidFill>
@@ -8032,7 +8399,7 @@
       </p:sp>
       <p:sp>
         <p:nvSpPr>
-          <p:cNvPr id="8" name="TextBox 7"/>
+          <p:cNvPr id="7" name="TextBox 6"/>
           <p:cNvSpPr txBox="1"/>
           <p:nvPr/>
         </p:nvSpPr>
@@ -8061,7 +8428,7 @@
             <a:r>
               <a:rPr sz="2600" b="0" u="none">
                 <a:solidFill>
-                  <a:srgbClr val="12A48C"/>
+                  <a:srgbClr val="70AD47"/>
                 </a:solidFill>
                 <a:latin typeface="Times New Roman"/>
                 <a:ea typeface="Noto Sans CJK SC"/>
@@ -8071,7 +8438,7 @@
             <a:r>
               <a:rPr sz="2600" b="0" u="none">
                 <a:solidFill>
-                  <a:srgbClr val="102622"/>
+                  <a:srgbClr val="1D2B22"/>
                 </a:solidFill>
                 <a:latin typeface="Times New Roman"/>
                 <a:ea typeface="Noto Sans CJK SC"/>
@@ -8091,7 +8458,7 @@
             <a:r>
               <a:rPr sz="2600" b="0" u="none">
                 <a:solidFill>
-                  <a:srgbClr val="12A48C"/>
+                  <a:srgbClr val="70AD47"/>
                 </a:solidFill>
                 <a:latin typeface="Times New Roman"/>
                 <a:ea typeface="Noto Sans CJK SC"/>
@@ -8101,7 +8468,7 @@
             <a:r>
               <a:rPr sz="2600" b="0" u="none">
                 <a:solidFill>
-                  <a:srgbClr val="102622"/>
+                  <a:srgbClr val="1D2B22"/>
                 </a:solidFill>
                 <a:latin typeface="Times New Roman"/>
                 <a:ea typeface="Noto Sans CJK SC"/>
@@ -8113,7 +8480,7 @@
       </p:sp>
       <p:sp>
         <p:nvSpPr>
-          <p:cNvPr id="9" name="Rectangle 8"/>
+          <p:cNvPr id="8" name="Rectangle 7"/>
           <p:cNvSpPr/>
           <p:nvPr/>
         </p:nvSpPr>
@@ -8126,7 +8493,7 @@
             <a:avLst/>
           </a:prstGeom>
           <a:solidFill>
-            <a:srgbClr val="12A48C"/>
+            <a:srgbClr val="70AD47"/>
           </a:solidFill>
           <a:ln>
             <a:noFill/>
@@ -8157,14 +8524,14 @@
       </p:sp>
       <p:sp>
         <p:nvSpPr>
-          <p:cNvPr id="10" name="TextBox 9"/>
+          <p:cNvPr id="9" name="TextBox 8"/>
           <p:cNvSpPr txBox="1"/>
           <p:nvPr/>
         </p:nvSpPr>
         <p:spPr>
           <a:xfrm>
             <a:off x="548640" y="6345936"/>
-            <a:ext cx="8595360" cy="274320"/>
+            <a:ext cx="7498079" cy="274320"/>
           </a:xfrm>
           <a:prstGeom prst="rect">
             <a:avLst/>
@@ -8198,7 +8565,7 @@
       </p:sp>
       <p:sp>
         <p:nvSpPr>
-          <p:cNvPr id="11" name="TextBox 10"/>
+          <p:cNvPr id="10" name="TextBox 9"/>
           <p:cNvSpPr txBox="1"/>
           <p:nvPr/>
         </p:nvSpPr>
@@ -8270,7 +8637,7 @@
             <a:avLst/>
           </a:prstGeom>
           <a:solidFill>
-            <a:srgbClr val="0B6B5F"/>
+            <a:srgbClr val="FFFFFF"/>
           </a:solidFill>
           <a:ln>
             <a:noFill/>
@@ -8307,14 +8674,14 @@
         </p:nvSpPr>
         <p:spPr>
           <a:xfrm>
-            <a:off x="0" y="6711696"/>
-            <a:ext cx="12191695" cy="146304"/>
+            <a:off x="0" y="0"/>
+            <a:ext cx="12191695" cy="109728"/>
           </a:xfrm>
           <a:prstGeom prst="rect">
             <a:avLst/>
           </a:prstGeom>
           <a:solidFill>
-            <a:srgbClr val="12A48C"/>
+            <a:srgbClr val="3F7A52"/>
           </a:solidFill>
           <a:ln>
             <a:noFill/>
@@ -8345,14 +8712,102 @@
       </p:sp>
       <p:sp>
         <p:nvSpPr>
-          <p:cNvPr id="4" name="TextBox 3"/>
+          <p:cNvPr id="4" name="Rectangle 3"/>
+          <p:cNvSpPr/>
+          <p:nvPr/>
+        </p:nvSpPr>
+        <p:spPr>
+          <a:xfrm>
+            <a:off x="0" y="6748272"/>
+            <a:ext cx="12191695" cy="109728"/>
+          </a:xfrm>
+          <a:prstGeom prst="rect">
+            <a:avLst/>
+          </a:prstGeom>
+          <a:solidFill>
+            <a:srgbClr val="70AD47"/>
+          </a:solidFill>
+          <a:ln>
+            <a:noFill/>
+          </a:ln>
+          <a:effectLst/>
+        </p:spPr>
+        <p:style>
+          <a:lnRef idx="1">
+            <a:schemeClr val="accent1"/>
+          </a:lnRef>
+          <a:fillRef idx="3">
+            <a:schemeClr val="accent1"/>
+          </a:fillRef>
+          <a:effectRef idx="2">
+            <a:schemeClr val="accent1"/>
+          </a:effectRef>
+          <a:fontRef idx="minor">
+            <a:schemeClr val="lt1"/>
+          </a:fontRef>
+        </p:style>
+        <p:txBody>
+          <a:bodyPr rtlCol="0" anchor="ctr"/>
+          <a:lstStyle/>
+          <a:p>
+            <a:pPr algn="ctr"/>
+          </a:p>
+        </p:txBody>
+      </p:sp>
+      <p:sp>
+        <p:nvSpPr>
+          <p:cNvPr id="5" name="Rectangle 4"/>
+          <p:cNvSpPr/>
+          <p:nvPr/>
+        </p:nvSpPr>
+        <p:spPr>
+          <a:xfrm>
+            <a:off x="777240" y="2331720"/>
+            <a:ext cx="128016" cy="1371600"/>
+          </a:xfrm>
+          <a:prstGeom prst="rect">
+            <a:avLst/>
+          </a:prstGeom>
+          <a:solidFill>
+            <a:srgbClr val="70AD47"/>
+          </a:solidFill>
+          <a:ln>
+            <a:noFill/>
+          </a:ln>
+          <a:effectLst/>
+        </p:spPr>
+        <p:style>
+          <a:lnRef idx="1">
+            <a:schemeClr val="accent1"/>
+          </a:lnRef>
+          <a:fillRef idx="3">
+            <a:schemeClr val="accent1"/>
+          </a:fillRef>
+          <a:effectRef idx="2">
+            <a:schemeClr val="accent1"/>
+          </a:effectRef>
+          <a:fontRef idx="minor">
+            <a:schemeClr val="lt1"/>
+          </a:fontRef>
+        </p:style>
+        <p:txBody>
+          <a:bodyPr rtlCol="0" anchor="ctr"/>
+          <a:lstStyle/>
+          <a:p>
+            <a:pPr algn="ctr"/>
+          </a:p>
+        </p:txBody>
+      </p:sp>
+      <p:sp>
+        <p:nvSpPr>
+          <p:cNvPr id="6" name="TextBox 5"/>
           <p:cNvSpPr txBox="1"/>
           <p:nvPr/>
         </p:nvSpPr>
         <p:spPr>
           <a:xfrm>
-            <a:off x="777240" y="1188720"/>
-            <a:ext cx="3657600" cy="1554480"/>
+            <a:off x="1143000" y="1234440"/>
+            <a:ext cx="3657600" cy="1463040"/>
           </a:xfrm>
           <a:prstGeom prst="rect">
             <a:avLst/>
@@ -8369,12 +8824,12 @@
               <a:lnSpc>
                 <a:spcPct val="130000"/>
               </a:lnSpc>
-              <a:defRPr sz="9200"/>
+              <a:defRPr sz="8800"/>
             </a:pPr>
             <a:r>
-              <a:rPr sz="9200" b="1" u="none">
-                <a:solidFill>
-                  <a:srgbClr val="12A48C"/>
+              <a:rPr sz="8800" b="1" u="none">
+                <a:solidFill>
+                  <a:srgbClr val="EAF3EC"/>
                 </a:solidFill>
                 <a:latin typeface="Times New Roman"/>
                 <a:ea typeface="Noto Sans CJK SC"/>
@@ -8386,14 +8841,14 @@
       </p:sp>
       <p:sp>
         <p:nvSpPr>
-          <p:cNvPr id="5" name="TextBox 4"/>
+          <p:cNvPr id="7" name="TextBox 6"/>
           <p:cNvSpPr txBox="1"/>
           <p:nvPr/>
         </p:nvSpPr>
         <p:spPr>
           <a:xfrm>
-            <a:off x="841248" y="2834640"/>
-            <a:ext cx="10180015" cy="1097280"/>
+            <a:off x="1143000" y="2377440"/>
+            <a:ext cx="9905695" cy="1005840"/>
           </a:xfrm>
           <a:prstGeom prst="rect">
             <a:avLst/>
@@ -8415,7 +8870,7 @@
             <a:r>
               <a:rPr sz="4000" b="1" u="none">
                 <a:solidFill>
-                  <a:srgbClr val="FFFFFF"/>
+                  <a:srgbClr val="3F7A52"/>
                 </a:solidFill>
                 <a:latin typeface="Times New Roman"/>
                 <a:ea typeface="Noto Sans CJK SC"/>
@@ -8460,7 +8915,7 @@
           <a:noFill/>
           <a:ln w="15875">
             <a:solidFill>
-              <a:srgbClr val="D5EDE6"/>
+              <a:srgbClr val="DCEBE0"/>
             </a:solidFill>
           </a:ln>
           <a:effectLst/>
@@ -8504,7 +8959,7 @@
           <a:noFill/>
           <a:ln w="15875">
             <a:solidFill>
-              <a:srgbClr val="D5EDE6"/>
+              <a:srgbClr val="DCEBE0"/>
             </a:solidFill>
           </a:ln>
           <a:effectLst/>
@@ -8548,7 +9003,7 @@
           <a:noFill/>
           <a:ln w="15875">
             <a:solidFill>
-              <a:srgbClr val="D5EDE6"/>
+              <a:srgbClr val="DCEBE0"/>
             </a:solidFill>
           </a:ln>
           <a:effectLst/>
@@ -8577,20 +9032,22 @@
       </p:sp>
       <p:sp>
         <p:nvSpPr>
-          <p:cNvPr id="5" name="Rectangle 4"/>
+          <p:cNvPr id="5" name="Rounded Rectangle 4"/>
           <p:cNvSpPr/>
           <p:nvPr/>
         </p:nvSpPr>
         <p:spPr>
           <a:xfrm>
-            <a:off x="0" y="0"/>
-            <a:ext cx="12191695" cy="713232"/>
-          </a:xfrm>
-          <a:prstGeom prst="rect">
-            <a:avLst/>
+            <a:off x="548640" y="365760"/>
+            <a:ext cx="1792224" cy="566928"/>
+          </a:xfrm>
+          <a:prstGeom prst="roundRect">
+            <a:avLst>
+              <a:gd name="adj" fmla="val 10000"/>
+            </a:avLst>
           </a:prstGeom>
           <a:solidFill>
-            <a:srgbClr val="0B6B5F"/>
+            <a:srgbClr val="3F7A52"/>
           </a:solidFill>
           <a:ln>
             <a:noFill/>
@@ -8621,145 +9078,14 @@
       </p:sp>
       <p:sp>
         <p:nvSpPr>
-          <p:cNvPr id="6" name="Rectangle 5"/>
-          <p:cNvSpPr/>
-          <p:nvPr/>
-        </p:nvSpPr>
-        <p:spPr>
-          <a:xfrm>
-            <a:off x="0" y="713232"/>
-            <a:ext cx="12191695" cy="45720"/>
-          </a:xfrm>
-          <a:prstGeom prst="rect">
-            <a:avLst/>
-          </a:prstGeom>
-          <a:solidFill>
-            <a:srgbClr val="12A48C"/>
-          </a:solidFill>
-          <a:ln>
-            <a:noFill/>
-          </a:ln>
-          <a:effectLst/>
-        </p:spPr>
-        <p:style>
-          <a:lnRef idx="1">
-            <a:schemeClr val="accent1"/>
-          </a:lnRef>
-          <a:fillRef idx="3">
-            <a:schemeClr val="accent1"/>
-          </a:fillRef>
-          <a:effectRef idx="2">
-            <a:schemeClr val="accent1"/>
-          </a:effectRef>
-          <a:fontRef idx="minor">
-            <a:schemeClr val="lt1"/>
-          </a:fontRef>
-        </p:style>
-        <p:txBody>
-          <a:bodyPr rtlCol="0" anchor="ctr"/>
-          <a:lstStyle/>
-          <a:p>
-            <a:pPr algn="ctr"/>
-          </a:p>
-        </p:txBody>
-      </p:sp>
-      <p:sp>
-        <p:nvSpPr>
-          <p:cNvPr id="7" name="TextBox 6"/>
+          <p:cNvPr id="6" name="TextBox 5"/>
           <p:cNvSpPr txBox="1"/>
           <p:nvPr/>
         </p:nvSpPr>
         <p:spPr>
           <a:xfrm>
-            <a:off x="548640" y="109728"/>
-            <a:ext cx="8899855" cy="493776"/>
-          </a:xfrm>
-          <a:prstGeom prst="rect">
-            <a:avLst/>
-          </a:prstGeom>
-          <a:noFill/>
-        </p:spPr>
-        <p:txBody>
-          <a:bodyPr wrap="square" anchor="ctr" lIns="54864" rIns="54864" tIns="0" bIns="0">
-            <a:spAutoFit/>
-          </a:bodyPr>
-          <a:lstStyle/>
-          <a:p>
-            <a:pPr algn="l">
-              <a:lnSpc>
-                <a:spcPct val="130000"/>
-              </a:lnSpc>
-              <a:defRPr sz="2800"/>
-            </a:pPr>
-            <a:r>
-              <a:rPr sz="2800" b="1" u="none">
-                <a:solidFill>
-                  <a:srgbClr val="FFFFFF"/>
-                </a:solidFill>
-                <a:latin typeface="Times New Roman"/>
-                <a:ea typeface="Noto Sans CJK SC"/>
-              </a:rPr>
-              <a:t>参考答案</a:t>
-            </a:r>
-          </a:p>
-        </p:txBody>
-      </p:sp>
-      <p:sp>
-        <p:nvSpPr>
-          <p:cNvPr id="8" name="Rounded Rectangle 7"/>
-          <p:cNvSpPr/>
-          <p:nvPr/>
-        </p:nvSpPr>
-        <p:spPr>
-          <a:xfrm>
-            <a:off x="11012119" y="173736"/>
-            <a:ext cx="676656" cy="365760"/>
-          </a:xfrm>
-          <a:prstGeom prst="roundRect">
-            <a:avLst>
-              <a:gd name="adj" fmla="val 30000"/>
-            </a:avLst>
-          </a:prstGeom>
-          <a:solidFill>
-            <a:srgbClr val="12A48C"/>
-          </a:solidFill>
-          <a:ln>
-            <a:noFill/>
-          </a:ln>
-          <a:effectLst/>
-        </p:spPr>
-        <p:style>
-          <a:lnRef idx="1">
-            <a:schemeClr val="accent1"/>
-          </a:lnRef>
-          <a:fillRef idx="3">
-            <a:schemeClr val="accent1"/>
-          </a:fillRef>
-          <a:effectRef idx="2">
-            <a:schemeClr val="accent1"/>
-          </a:effectRef>
-          <a:fontRef idx="minor">
-            <a:schemeClr val="lt1"/>
-          </a:fontRef>
-        </p:style>
-        <p:txBody>
-          <a:bodyPr rtlCol="0" anchor="ctr"/>
-          <a:lstStyle/>
-          <a:p>
-            <a:pPr algn="ctr"/>
-          </a:p>
-        </p:txBody>
-      </p:sp>
-      <p:sp>
-        <p:nvSpPr>
-          <p:cNvPr id="9" name="TextBox 8"/>
-          <p:cNvSpPr txBox="1"/>
-          <p:nvPr/>
-        </p:nvSpPr>
-        <p:spPr>
-          <a:xfrm>
-            <a:off x="11012119" y="192024"/>
-            <a:ext cx="676656" cy="329184"/>
+            <a:off x="548640" y="384048"/>
+            <a:ext cx="1792224" cy="530352"/>
           </a:xfrm>
           <a:prstGeom prst="rect">
             <a:avLst/>
@@ -8776,24 +9102,24 @@
               <a:lnSpc>
                 <a:spcPct val="130000"/>
               </a:lnSpc>
-              <a:defRPr sz="1100"/>
+              <a:defRPr sz="2300"/>
             </a:pPr>
             <a:r>
-              <a:rPr sz="1100" b="1" u="none">
+              <a:rPr sz="2300" b="1" u="none">
                 <a:solidFill>
                   <a:srgbClr val="FFFFFF"/>
                 </a:solidFill>
                 <a:latin typeface="Times New Roman"/>
                 <a:ea typeface="Noto Sans CJK SC"/>
               </a:rPr>
-              <a:t>答案</a:t>
-            </a:r>
-          </a:p>
-        </p:txBody>
-      </p:sp>
-      <p:sp>
-        <p:nvSpPr>
-          <p:cNvPr id="10" name="TextBox 9"/>
+              <a:t>参考答案</a:t>
+            </a:r>
+          </a:p>
+        </p:txBody>
+      </p:sp>
+      <p:sp>
+        <p:nvSpPr>
+          <p:cNvPr id="7" name="TextBox 6"/>
           <p:cNvSpPr txBox="1"/>
           <p:nvPr/>
         </p:nvSpPr>
@@ -8822,7 +9148,7 @@
             <a:r>
               <a:rPr sz="2600" b="0" u="none">
                 <a:solidFill>
-                  <a:srgbClr val="102622"/>
+                  <a:srgbClr val="1D2B22"/>
                 </a:solidFill>
                 <a:latin typeface="Times New Roman"/>
                 <a:ea typeface="Noto Sans CJK SC"/>
@@ -8842,7 +9168,7 @@
             <a:r>
               <a:rPr sz="2600" b="0" u="none">
                 <a:solidFill>
-                  <a:srgbClr val="102622"/>
+                  <a:srgbClr val="1D2B22"/>
                 </a:solidFill>
                 <a:latin typeface="Times New Roman"/>
                 <a:ea typeface="Noto Sans CJK SC"/>
@@ -8862,7 +9188,7 @@
             <a:r>
               <a:rPr sz="2600" b="0" u="none">
                 <a:solidFill>
-                  <a:srgbClr val="12A48C"/>
+                  <a:srgbClr val="70AD47"/>
                 </a:solidFill>
                 <a:latin typeface="Times New Roman"/>
                 <a:ea typeface="Noto Sans CJK SC"/>
@@ -8872,7 +9198,7 @@
             <a:r>
               <a:rPr sz="2600" b="1" u="none">
                 <a:solidFill>
-                  <a:srgbClr val="C2410C"/>
+                  <a:srgbClr val="C00000"/>
                 </a:solidFill>
                 <a:latin typeface="Times New Roman"/>
                 <a:ea typeface="Noto Sans CJK SC"/>
@@ -8882,7 +9208,7 @@
             <a:r>
               <a:rPr sz="2600" b="0" u="none">
                 <a:solidFill>
-                  <a:srgbClr val="102622"/>
+                  <a:srgbClr val="1D2B22"/>
                 </a:solidFill>
                 <a:latin typeface="Times New Roman"/>
                 <a:ea typeface="Noto Sans CJK SC"/>
@@ -8894,7 +9220,7 @@
       </p:sp>
       <p:sp>
         <p:nvSpPr>
-          <p:cNvPr id="11" name="Rectangle 10"/>
+          <p:cNvPr id="8" name="Rectangle 7"/>
           <p:cNvSpPr/>
           <p:nvPr/>
         </p:nvSpPr>
@@ -8907,7 +9233,7 @@
             <a:avLst/>
           </a:prstGeom>
           <a:solidFill>
-            <a:srgbClr val="12A48C"/>
+            <a:srgbClr val="70AD47"/>
           </a:solidFill>
           <a:ln>
             <a:noFill/>
@@ -8938,14 +9264,14 @@
       </p:sp>
       <p:sp>
         <p:nvSpPr>
-          <p:cNvPr id="12" name="TextBox 11"/>
+          <p:cNvPr id="9" name="TextBox 8"/>
           <p:cNvSpPr txBox="1"/>
           <p:nvPr/>
         </p:nvSpPr>
         <p:spPr>
           <a:xfrm>
             <a:off x="548640" y="6345936"/>
-            <a:ext cx="8595360" cy="274320"/>
+            <a:ext cx="7498079" cy="274320"/>
           </a:xfrm>
           <a:prstGeom prst="rect">
             <a:avLst/>
@@ -8979,7 +9305,7 @@
       </p:sp>
       <p:sp>
         <p:nvSpPr>
-          <p:cNvPr id="13" name="TextBox 12"/>
+          <p:cNvPr id="10" name="TextBox 9"/>
           <p:cNvSpPr txBox="1"/>
           <p:nvPr/>
         </p:nvSpPr>
